--- a/docs/Презентация.pptx
+++ b/docs/Презентация.pptx
@@ -3228,13 +3228,50 @@
           <a:lstStyle/>
           <a:p>
             <a:r>
-              <a:rPr sz="1600" b="0">
-                <a:solidFill>
-                  <a:srgbClr val="222222"/>
-                </a:solidFill>
-              </a:rPr>
-              <a:t>Менеджер · Разработчик · Тестировщик</a:t>
-            </a:r>
+              <a:rPr sz="1600" b="0" dirty="0" err="1">
+                <a:solidFill>
+                  <a:srgbClr val="222222"/>
+                </a:solidFill>
+              </a:rPr>
+              <a:t>Менеджер</a:t>
+            </a:r>
+            <a:r>
+              <a:rPr sz="1600" b="0" dirty="0">
+                <a:solidFill>
+                  <a:srgbClr val="222222"/>
+                </a:solidFill>
+              </a:rPr>
+              <a:t> · </a:t>
+            </a:r>
+            <a:r>
+              <a:rPr sz="1600" b="0" dirty="0" err="1">
+                <a:solidFill>
+                  <a:srgbClr val="222222"/>
+                </a:solidFill>
+              </a:rPr>
+              <a:t>Разработчик</a:t>
+            </a:r>
+            <a:r>
+              <a:rPr sz="1600" b="0" dirty="0">
+                <a:solidFill>
+                  <a:srgbClr val="222222"/>
+                </a:solidFill>
+              </a:rPr>
+              <a:t> · </a:t>
+            </a:r>
+            <a:r>
+              <a:rPr sz="1600" b="0" dirty="0" err="1">
+                <a:solidFill>
+                  <a:srgbClr val="222222"/>
+                </a:solidFill>
+              </a:rPr>
+              <a:t>Тестировщик</a:t>
+            </a:r>
+            <a:endParaRPr sz="1600" b="0" dirty="0">
+              <a:solidFill>
+                <a:srgbClr val="222222"/>
+              </a:solidFill>
+            </a:endParaRPr>
           </a:p>
         </p:txBody>
       </p:sp>
@@ -4296,39 +4333,6 @@
       </p:sp>
       <p:sp>
         <p:nvSpPr>
-          <p:cNvPr id="4" name="TextBox 3"/>
-          <p:cNvSpPr txBox="1"/>
-          <p:nvPr/>
-        </p:nvSpPr>
-        <p:spPr>
-          <a:xfrm>
-            <a:off x="640080" y="914400"/>
-            <a:ext cx="10911535" cy="457200"/>
-          </a:xfrm>
-          <a:prstGeom prst="rect">
-            <a:avLst/>
-          </a:prstGeom>
-          <a:noFill/>
-        </p:spPr>
-        <p:txBody>
-          <a:bodyPr wrap="square">
-            <a:spAutoFit/>
-          </a:bodyPr>
-          <a:lstStyle/>
-          <a:p>
-            <a:r>
-              <a:rPr sz="1800" b="1">
-                <a:solidFill>
-                  <a:srgbClr val="222222"/>
-                </a:solidFill>
-              </a:rPr>
-              <a:t>Всего тест-кейсов: 15 (см. docs/Тест-сценарий.md).</a:t>
-            </a:r>
-          </a:p>
-        </p:txBody>
-      </p:sp>
-      <p:sp>
-        <p:nvSpPr>
           <p:cNvPr id="5" name="TextBox 4"/>
           <p:cNvSpPr txBox="1"/>
           <p:nvPr/>
@@ -5495,7 +5499,7 @@
         <p:spPr>
           <a:xfrm>
             <a:off x="640080" y="914400"/>
-            <a:ext cx="10911535" cy="5486400"/>
+            <a:ext cx="10911535" cy="2139047"/>
           </a:xfrm>
           <a:prstGeom prst="rect">
             <a:avLst/>
@@ -5514,12 +5518,92 @@
               </a:spcAft>
             </a:pPr>
             <a:r>
-              <a:rPr sz="1800">
-                <a:solidFill>
-                  <a:srgbClr val="222222"/>
-                </a:solidFill>
-              </a:rPr>
-              <a:t>• Python 3.10+; интерфейс — стандартный Tkinter (без сторонних GUI).</a:t>
+              <a:rPr sz="1800" dirty="0">
+                <a:solidFill>
+                  <a:srgbClr val="222222"/>
+                </a:solidFill>
+              </a:rPr>
+              <a:t>• Python 3.10+; </a:t>
+            </a:r>
+            <a:r>
+              <a:rPr sz="1800" dirty="0" err="1">
+                <a:solidFill>
+                  <a:srgbClr val="222222"/>
+                </a:solidFill>
+              </a:rPr>
+              <a:t>интерфейс</a:t>
+            </a:r>
+            <a:r>
+              <a:rPr sz="1800" dirty="0">
+                <a:solidFill>
+                  <a:srgbClr val="222222"/>
+                </a:solidFill>
+              </a:rPr>
+              <a:t> — </a:t>
+            </a:r>
+            <a:r>
+              <a:rPr sz="1800" dirty="0" err="1">
+                <a:solidFill>
+                  <a:srgbClr val="222222"/>
+                </a:solidFill>
+              </a:rPr>
+              <a:t>стандартный</a:t>
+            </a:r>
+            <a:r>
+              <a:rPr sz="1800" dirty="0">
+                <a:solidFill>
+                  <a:srgbClr val="222222"/>
+                </a:solidFill>
+              </a:rPr>
+              <a:t> </a:t>
+            </a:r>
+            <a:r>
+              <a:rPr sz="1800" dirty="0" err="1">
+                <a:solidFill>
+                  <a:srgbClr val="222222"/>
+                </a:solidFill>
+              </a:rPr>
+              <a:t>Tkinter</a:t>
+            </a:r>
+            <a:r>
+              <a:rPr sz="1800" dirty="0">
+                <a:solidFill>
+                  <a:srgbClr val="222222"/>
+                </a:solidFill>
+              </a:rPr>
+              <a:t> (</a:t>
+            </a:r>
+            <a:r>
+              <a:rPr sz="1800" dirty="0" err="1">
+                <a:solidFill>
+                  <a:srgbClr val="222222"/>
+                </a:solidFill>
+              </a:rPr>
+              <a:t>без</a:t>
+            </a:r>
+            <a:r>
+              <a:rPr sz="1800" dirty="0">
+                <a:solidFill>
+                  <a:srgbClr val="222222"/>
+                </a:solidFill>
+              </a:rPr>
+              <a:t> </a:t>
+            </a:r>
+            <a:r>
+              <a:rPr sz="1800" dirty="0" err="1">
+                <a:solidFill>
+                  <a:srgbClr val="222222"/>
+                </a:solidFill>
+              </a:rPr>
+              <a:t>сторонних</a:t>
+            </a:r>
+            <a:r>
+              <a:rPr sz="1800" dirty="0">
+                <a:solidFill>
+                  <a:srgbClr val="222222"/>
+                </a:solidFill>
+              </a:rPr>
+              <a:t> GUI).</a:t>
             </a:r>
           </a:p>
           <a:p>
@@ -5529,12 +5613,124 @@
               </a:spcAft>
             </a:pPr>
             <a:r>
-              <a:rPr sz="1800">
-                <a:solidFill>
-                  <a:srgbClr val="222222"/>
-                </a:solidFill>
-              </a:rPr>
-              <a:t>• Запуск одной командой: python main.py. Без сетевых зависимостей.</a:t>
+              <a:rPr sz="1800" dirty="0">
+                <a:solidFill>
+                  <a:srgbClr val="222222"/>
+                </a:solidFill>
+              </a:rPr>
+              <a:t>• </a:t>
+            </a:r>
+            <a:r>
+              <a:rPr sz="1800" dirty="0" err="1">
+                <a:solidFill>
+                  <a:srgbClr val="222222"/>
+                </a:solidFill>
+              </a:rPr>
+              <a:t>Запуск</a:t>
+            </a:r>
+            <a:r>
+              <a:rPr sz="1800" dirty="0">
+                <a:solidFill>
+                  <a:srgbClr val="222222"/>
+                </a:solidFill>
+              </a:rPr>
+              <a:t> </a:t>
+            </a:r>
+            <a:r>
+              <a:rPr sz="1800" dirty="0" err="1">
+                <a:solidFill>
+                  <a:srgbClr val="222222"/>
+                </a:solidFill>
+              </a:rPr>
+              <a:t>одной</a:t>
+            </a:r>
+            <a:r>
+              <a:rPr sz="1800" dirty="0">
+                <a:solidFill>
+                  <a:srgbClr val="222222"/>
+                </a:solidFill>
+              </a:rPr>
+              <a:t> </a:t>
+            </a:r>
+            <a:r>
+              <a:rPr sz="1800" dirty="0" err="1">
+                <a:solidFill>
+                  <a:srgbClr val="222222"/>
+                </a:solidFill>
+              </a:rPr>
+              <a:t>командой</a:t>
+            </a:r>
+            <a:r>
+              <a:rPr sz="1800" dirty="0">
+                <a:solidFill>
+                  <a:srgbClr val="222222"/>
+                </a:solidFill>
+              </a:rPr>
+              <a:t>: python </a:t>
+            </a:r>
+            <a:r>
+              <a:rPr sz="1800" dirty="0" err="1">
+                <a:solidFill>
+                  <a:srgbClr val="222222"/>
+                </a:solidFill>
+              </a:rPr>
+              <a:t>main.py</a:t>
+            </a:r>
+            <a:r>
+              <a:rPr sz="1800" dirty="0">
+                <a:solidFill>
+                  <a:srgbClr val="222222"/>
+                </a:solidFill>
+              </a:rPr>
+              <a:t>. </a:t>
+            </a:r>
+            <a:r>
+              <a:rPr sz="1800" dirty="0" err="1">
+                <a:solidFill>
+                  <a:srgbClr val="222222"/>
+                </a:solidFill>
+              </a:rPr>
+              <a:t>Без</a:t>
+            </a:r>
+            <a:r>
+              <a:rPr sz="1800" dirty="0">
+                <a:solidFill>
+                  <a:srgbClr val="222222"/>
+                </a:solidFill>
+              </a:rPr>
+              <a:t> </a:t>
+            </a:r>
+            <a:r>
+              <a:rPr sz="1800" dirty="0" err="1">
+                <a:solidFill>
+                  <a:srgbClr val="222222"/>
+                </a:solidFill>
+              </a:rPr>
+              <a:t>сетевых</a:t>
+            </a:r>
+            <a:r>
+              <a:rPr sz="1800" dirty="0">
+                <a:solidFill>
+                  <a:srgbClr val="222222"/>
+                </a:solidFill>
+              </a:rPr>
+              <a:t> </a:t>
+            </a:r>
+            <a:r>
+              <a:rPr sz="1800" dirty="0" err="1">
+                <a:solidFill>
+                  <a:srgbClr val="222222"/>
+                </a:solidFill>
+              </a:rPr>
+              <a:t>зависимостей</a:t>
+            </a:r>
+            <a:r>
+              <a:rPr sz="1800" dirty="0">
+                <a:solidFill>
+                  <a:srgbClr val="222222"/>
+                </a:solidFill>
+              </a:rPr>
+              <a:t>.</a:t>
             </a:r>
           </a:p>
           <a:p>
@@ -5544,12 +5740,108 @@
               </a:spcAft>
             </a:pPr>
             <a:r>
-              <a:rPr sz="1800">
-                <a:solidFill>
-                  <a:srgbClr val="222222"/>
-                </a:solidFill>
-              </a:rPr>
-              <a:t>• Архитектура по принципам ООП: инкапсуляция, наследование, полиморфизм.</a:t>
+              <a:rPr sz="1800" dirty="0">
+                <a:solidFill>
+                  <a:srgbClr val="222222"/>
+                </a:solidFill>
+              </a:rPr>
+              <a:t>• </a:t>
+            </a:r>
+            <a:r>
+              <a:rPr sz="1800" dirty="0" err="1">
+                <a:solidFill>
+                  <a:srgbClr val="222222"/>
+                </a:solidFill>
+              </a:rPr>
+              <a:t>Архитектура</a:t>
+            </a:r>
+            <a:r>
+              <a:rPr sz="1800" dirty="0">
+                <a:solidFill>
+                  <a:srgbClr val="222222"/>
+                </a:solidFill>
+              </a:rPr>
+              <a:t> </a:t>
+            </a:r>
+            <a:r>
+              <a:rPr sz="1800" dirty="0" err="1">
+                <a:solidFill>
+                  <a:srgbClr val="222222"/>
+                </a:solidFill>
+              </a:rPr>
+              <a:t>по</a:t>
+            </a:r>
+            <a:r>
+              <a:rPr sz="1800" dirty="0">
+                <a:solidFill>
+                  <a:srgbClr val="222222"/>
+                </a:solidFill>
+              </a:rPr>
+              <a:t> </a:t>
+            </a:r>
+            <a:r>
+              <a:rPr sz="1800" dirty="0" err="1">
+                <a:solidFill>
+                  <a:srgbClr val="222222"/>
+                </a:solidFill>
+              </a:rPr>
+              <a:t>принципам</a:t>
+            </a:r>
+            <a:r>
+              <a:rPr sz="1800" dirty="0">
+                <a:solidFill>
+                  <a:srgbClr val="222222"/>
+                </a:solidFill>
+              </a:rPr>
+              <a:t> ООП: </a:t>
+            </a:r>
+            <a:r>
+              <a:rPr sz="1800" dirty="0" err="1">
+                <a:solidFill>
+                  <a:srgbClr val="222222"/>
+                </a:solidFill>
+              </a:rPr>
+              <a:t>инкапсуляция</a:t>
+            </a:r>
+            <a:r>
+              <a:rPr sz="1800" dirty="0">
+                <a:solidFill>
+                  <a:srgbClr val="222222"/>
+                </a:solidFill>
+              </a:rPr>
+              <a:t>, </a:t>
+            </a:r>
+            <a:r>
+              <a:rPr sz="1800" dirty="0" err="1">
+                <a:solidFill>
+                  <a:srgbClr val="222222"/>
+                </a:solidFill>
+              </a:rPr>
+              <a:t>наследование</a:t>
+            </a:r>
+            <a:r>
+              <a:rPr sz="1800" dirty="0">
+                <a:solidFill>
+                  <a:srgbClr val="222222"/>
+                </a:solidFill>
+              </a:rPr>
+              <a:t>, </a:t>
+            </a:r>
+            <a:r>
+              <a:rPr sz="1800" dirty="0" err="1">
+                <a:solidFill>
+                  <a:srgbClr val="222222"/>
+                </a:solidFill>
+              </a:rPr>
+              <a:t>полиморфизм</a:t>
+            </a:r>
+            <a:r>
+              <a:rPr sz="1800" dirty="0">
+                <a:solidFill>
+                  <a:srgbClr val="222222"/>
+                </a:solidFill>
+              </a:rPr>
+              <a:t>.</a:t>
             </a:r>
           </a:p>
           <a:p>
@@ -5559,12 +5851,156 @@
               </a:spcAft>
             </a:pPr>
             <a:r>
-              <a:rPr sz="1800">
-                <a:solidFill>
-                  <a:srgbClr val="222222"/>
-                </a:solidFill>
-              </a:rPr>
-              <a:t>• Минимизация связей: GUI не лезет в Field и формат файла напрямую.</a:t>
+              <a:rPr sz="1800" dirty="0">
+                <a:solidFill>
+                  <a:srgbClr val="222222"/>
+                </a:solidFill>
+              </a:rPr>
+              <a:t>• </a:t>
+            </a:r>
+            <a:r>
+              <a:rPr sz="1800" dirty="0" err="1">
+                <a:solidFill>
+                  <a:srgbClr val="222222"/>
+                </a:solidFill>
+              </a:rPr>
+              <a:t>Минимизация</a:t>
+            </a:r>
+            <a:r>
+              <a:rPr sz="1800" dirty="0">
+                <a:solidFill>
+                  <a:srgbClr val="222222"/>
+                </a:solidFill>
+              </a:rPr>
+              <a:t> </a:t>
+            </a:r>
+            <a:r>
+              <a:rPr sz="1800" dirty="0" err="1">
+                <a:solidFill>
+                  <a:srgbClr val="222222"/>
+                </a:solidFill>
+              </a:rPr>
+              <a:t>связей</a:t>
+            </a:r>
+            <a:r>
+              <a:rPr sz="1800" dirty="0">
+                <a:solidFill>
+                  <a:srgbClr val="222222"/>
+                </a:solidFill>
+              </a:rPr>
+              <a:t>: GUI </a:t>
+            </a:r>
+            <a:r>
+              <a:rPr sz="1800" dirty="0" err="1">
+                <a:solidFill>
+                  <a:srgbClr val="222222"/>
+                </a:solidFill>
+              </a:rPr>
+              <a:t>не</a:t>
+            </a:r>
+            <a:r>
+              <a:rPr sz="1800" dirty="0">
+                <a:solidFill>
+                  <a:srgbClr val="222222"/>
+                </a:solidFill>
+              </a:rPr>
+              <a:t> </a:t>
+            </a:r>
+            <a:r>
+              <a:rPr sz="1800" dirty="0" err="1">
+                <a:solidFill>
+                  <a:srgbClr val="222222"/>
+                </a:solidFill>
+              </a:rPr>
+              <a:t>лезет</a:t>
+            </a:r>
+            <a:r>
+              <a:rPr sz="1800" dirty="0">
+                <a:solidFill>
+                  <a:srgbClr val="222222"/>
+                </a:solidFill>
+              </a:rPr>
+              <a:t> </a:t>
+            </a:r>
+            <a:r>
+              <a:rPr sz="1800" dirty="0" err="1">
+                <a:solidFill>
+                  <a:srgbClr val="222222"/>
+                </a:solidFill>
+              </a:rPr>
+              <a:t>в</a:t>
+            </a:r>
+            <a:r>
+              <a:rPr sz="1800" dirty="0">
+                <a:solidFill>
+                  <a:srgbClr val="222222"/>
+                </a:solidFill>
+              </a:rPr>
+              <a:t> Field </a:t>
+            </a:r>
+            <a:r>
+              <a:rPr sz="1800" dirty="0" err="1">
+                <a:solidFill>
+                  <a:srgbClr val="222222"/>
+                </a:solidFill>
+              </a:rPr>
+              <a:t>и</a:t>
+            </a:r>
+            <a:r>
+              <a:rPr sz="1800" dirty="0">
+                <a:solidFill>
+                  <a:srgbClr val="222222"/>
+                </a:solidFill>
+              </a:rPr>
+              <a:t> </a:t>
+            </a:r>
+            <a:r>
+              <a:rPr sz="1800" dirty="0" err="1">
+                <a:solidFill>
+                  <a:srgbClr val="222222"/>
+                </a:solidFill>
+              </a:rPr>
+              <a:t>формат</a:t>
+            </a:r>
+            <a:r>
+              <a:rPr sz="1800" dirty="0">
+                <a:solidFill>
+                  <a:srgbClr val="222222"/>
+                </a:solidFill>
+              </a:rPr>
+              <a:t> </a:t>
+            </a:r>
+            <a:r>
+              <a:rPr sz="1800" dirty="0" err="1">
+                <a:solidFill>
+                  <a:srgbClr val="222222"/>
+                </a:solidFill>
+              </a:rPr>
+              <a:t>файла</a:t>
+            </a:r>
+            <a:r>
+              <a:rPr sz="1800" dirty="0">
+                <a:solidFill>
+                  <a:srgbClr val="222222"/>
+                </a:solidFill>
+              </a:rPr>
+              <a:t> </a:t>
+            </a:r>
+            <a:r>
+              <a:rPr sz="1800" dirty="0" err="1">
+                <a:solidFill>
+                  <a:srgbClr val="222222"/>
+                </a:solidFill>
+              </a:rPr>
+              <a:t>напрямую</a:t>
+            </a:r>
+            <a:r>
+              <a:rPr sz="1800" dirty="0">
+                <a:solidFill>
+                  <a:srgbClr val="222222"/>
+                </a:solidFill>
+              </a:rPr>
+              <a:t>.</a:t>
             </a:r>
           </a:p>
           <a:p>
@@ -5574,12 +6010,28 @@
               </a:spcAft>
             </a:pPr>
             <a:r>
-              <a:rPr sz="1800">
-                <a:solidFill>
-                  <a:srgbClr val="222222"/>
-                </a:solidFill>
-              </a:rPr>
-              <a:t>• Кросс-платформенность: macOS, Windows, Linux.</a:t>
+              <a:rPr sz="1800" dirty="0">
+                <a:solidFill>
+                  <a:srgbClr val="222222"/>
+                </a:solidFill>
+              </a:rPr>
+              <a:t>• </a:t>
+            </a:r>
+            <a:r>
+              <a:rPr sz="1800" dirty="0" err="1">
+                <a:solidFill>
+                  <a:srgbClr val="222222"/>
+                </a:solidFill>
+              </a:rPr>
+              <a:t>Кросс-платформенность</a:t>
+            </a:r>
+            <a:r>
+              <a:rPr sz="1800" dirty="0">
+                <a:solidFill>
+                  <a:srgbClr val="222222"/>
+                </a:solidFill>
+              </a:rPr>
+              <a:t>: Windows, Linux.</a:t>
             </a:r>
           </a:p>
           <a:p>
@@ -5589,12 +6041,108 @@
               </a:spcAft>
             </a:pPr>
             <a:r>
-              <a:rPr sz="1800">
-                <a:solidFill>
-                  <a:srgbClr val="222222"/>
-                </a:solidFill>
-              </a:rPr>
-              <a:t>• Логика проверена ручными smoke-тестами (мигалка, глайдер).</a:t>
+              <a:rPr sz="1800" dirty="0">
+                <a:solidFill>
+                  <a:srgbClr val="222222"/>
+                </a:solidFill>
+              </a:rPr>
+              <a:t>• </a:t>
+            </a:r>
+            <a:r>
+              <a:rPr sz="1800" dirty="0" err="1">
+                <a:solidFill>
+                  <a:srgbClr val="222222"/>
+                </a:solidFill>
+              </a:rPr>
+              <a:t>Логика</a:t>
+            </a:r>
+            <a:r>
+              <a:rPr sz="1800" dirty="0">
+                <a:solidFill>
+                  <a:srgbClr val="222222"/>
+                </a:solidFill>
+              </a:rPr>
+              <a:t> </a:t>
+            </a:r>
+            <a:r>
+              <a:rPr sz="1800" dirty="0" err="1">
+                <a:solidFill>
+                  <a:srgbClr val="222222"/>
+                </a:solidFill>
+              </a:rPr>
+              <a:t>проверена</a:t>
+            </a:r>
+            <a:r>
+              <a:rPr sz="1800" dirty="0">
+                <a:solidFill>
+                  <a:srgbClr val="222222"/>
+                </a:solidFill>
+              </a:rPr>
+              <a:t> </a:t>
+            </a:r>
+            <a:r>
+              <a:rPr sz="1800" dirty="0" err="1">
+                <a:solidFill>
+                  <a:srgbClr val="222222"/>
+                </a:solidFill>
+              </a:rPr>
+              <a:t>ручными</a:t>
+            </a:r>
+            <a:r>
+              <a:rPr sz="1800" dirty="0">
+                <a:solidFill>
+                  <a:srgbClr val="222222"/>
+                </a:solidFill>
+              </a:rPr>
+              <a:t> smoke-</a:t>
+            </a:r>
+            <a:r>
+              <a:rPr sz="1800" dirty="0" err="1">
+                <a:solidFill>
+                  <a:srgbClr val="222222"/>
+                </a:solidFill>
+              </a:rPr>
+              <a:t>тестами</a:t>
+            </a:r>
+            <a:r>
+              <a:rPr sz="1800" dirty="0">
+                <a:solidFill>
+                  <a:srgbClr val="222222"/>
+                </a:solidFill>
+              </a:rPr>
+              <a:t> (</a:t>
+            </a:r>
+            <a:r>
+              <a:rPr sz="1800" dirty="0" err="1">
+                <a:solidFill>
+                  <a:srgbClr val="222222"/>
+                </a:solidFill>
+              </a:rPr>
+              <a:t>мигалка</a:t>
+            </a:r>
+            <a:r>
+              <a:rPr sz="1800" dirty="0">
+                <a:solidFill>
+                  <a:srgbClr val="222222"/>
+                </a:solidFill>
+              </a:rPr>
+              <a:t>, </a:t>
+            </a:r>
+            <a:r>
+              <a:rPr sz="1800" dirty="0" err="1">
+                <a:solidFill>
+                  <a:srgbClr val="222222"/>
+                </a:solidFill>
+              </a:rPr>
+              <a:t>глайдер</a:t>
+            </a:r>
+            <a:r>
+              <a:rPr sz="1800" dirty="0">
+                <a:solidFill>
+                  <a:srgbClr val="222222"/>
+                </a:solidFill>
+              </a:rPr>
+              <a:t>).</a:t>
             </a:r>
           </a:p>
         </p:txBody>

--- a/docs/Презентация.pptx
+++ b/docs/Презентация.pptx
@@ -3129,7 +3129,7 @@
           <a:lstStyle/>
           <a:p>
             <a:r>
-              <a:rPr sz="7200" b="1">
+              <a:rPr sz="7200" b="1" dirty="0">
                 <a:solidFill>
                   <a:srgbClr val="183E6B"/>
                 </a:solidFill>
@@ -3162,13 +3162,82 @@
           <a:lstStyle/>
           <a:p>
             <a:r>
-              <a:rPr sz="2800" b="0">
-                <a:solidFill>
-                  <a:srgbClr val="222222"/>
-                </a:solidFill>
-              </a:rPr>
-              <a:t>Реализация клеточного автомата Дж. Конвея</a:t>
-            </a:r>
+              <a:rPr sz="2800" b="0" dirty="0" err="1">
+                <a:solidFill>
+                  <a:srgbClr val="222222"/>
+                </a:solidFill>
+              </a:rPr>
+              <a:t>Реализация</a:t>
+            </a:r>
+            <a:r>
+              <a:rPr sz="2800" b="0" dirty="0">
+                <a:solidFill>
+                  <a:srgbClr val="222222"/>
+                </a:solidFill>
+              </a:rPr>
+              <a:t> </a:t>
+            </a:r>
+            <a:r>
+              <a:rPr sz="2800" b="0" dirty="0" err="1">
+                <a:solidFill>
+                  <a:srgbClr val="222222"/>
+                </a:solidFill>
+              </a:rPr>
+              <a:t>клеточного</a:t>
+            </a:r>
+            <a:r>
+              <a:rPr sz="2800" b="0" dirty="0">
+                <a:solidFill>
+                  <a:srgbClr val="222222"/>
+                </a:solidFill>
+              </a:rPr>
+              <a:t> </a:t>
+            </a:r>
+            <a:r>
+              <a:rPr sz="2800" b="0" dirty="0" err="1">
+                <a:solidFill>
+                  <a:srgbClr val="222222"/>
+                </a:solidFill>
+              </a:rPr>
+              <a:t>автомата</a:t>
+            </a:r>
+            <a:r>
+              <a:rPr sz="2800" b="0" dirty="0">
+                <a:solidFill>
+                  <a:srgbClr val="222222"/>
+                </a:solidFill>
+              </a:rPr>
+              <a:t> </a:t>
+            </a:r>
+            <a:r>
+              <a:rPr sz="2800" b="0" dirty="0" err="1">
+                <a:solidFill>
+                  <a:srgbClr val="222222"/>
+                </a:solidFill>
+              </a:rPr>
+              <a:t>Дж</a:t>
+            </a:r>
+            <a:r>
+              <a:rPr sz="2800" b="0" dirty="0">
+                <a:solidFill>
+                  <a:srgbClr val="222222"/>
+                </a:solidFill>
+              </a:rPr>
+              <a:t>. </a:t>
+            </a:r>
+            <a:r>
+              <a:rPr sz="2800" b="0" dirty="0" err="1">
+                <a:solidFill>
+                  <a:srgbClr val="222222"/>
+                </a:solidFill>
+              </a:rPr>
+              <a:t>Конвея</a:t>
+            </a:r>
+            <a:endParaRPr sz="2800" b="0" dirty="0">
+              <a:solidFill>
+                <a:srgbClr val="222222"/>
+              </a:solidFill>
+            </a:endParaRPr>
           </a:p>
         </p:txBody>
       </p:sp>
@@ -6094,7 +6163,7 @@
                   <a:srgbClr val="222222"/>
                 </a:solidFill>
               </a:rPr>
-              <a:t> smoke-</a:t>
+              <a:t> </a:t>
             </a:r>
             <a:r>
               <a:rPr sz="1800" dirty="0" err="1">

--- a/docs/Презентация.pptx
+++ b/docs/Презентация.pptx
@@ -20,8 +20,7 @@
     <p:sldId id="268" r:id="rId14"/>
     <p:sldId id="269" r:id="rId15"/>
     <p:sldId id="270" r:id="rId16"/>
-    <p:sldId id="271" r:id="rId17"/>
-    <p:sldId id="272" r:id="rId18"/>
+    <p:sldId id="272" r:id="rId17"/>
   </p:sldIdLst>
   <p:sldSz cx="12192000" cy="6858000"/>
   <p:notesSz cx="6858000" cy="9144000"/>
@@ -4395,251 +4394,6 @@
                   <a:srgbClr val="183E6B"/>
                 </a:solidFill>
               </a:rPr>
-              <a:t>Результаты тестирования</a:t>
-            </a:r>
-          </a:p>
-        </p:txBody>
-      </p:sp>
-      <p:sp>
-        <p:nvSpPr>
-          <p:cNvPr id="5" name="TextBox 4"/>
-          <p:cNvSpPr txBox="1"/>
-          <p:nvPr/>
-        </p:nvSpPr>
-        <p:spPr>
-          <a:xfrm>
-            <a:off x="640080" y="1554480"/>
-            <a:ext cx="10911535" cy="5029200"/>
-          </a:xfrm>
-          <a:prstGeom prst="rect">
-            <a:avLst/>
-          </a:prstGeom>
-          <a:noFill/>
-        </p:spPr>
-        <p:txBody>
-          <a:bodyPr wrap="square">
-            <a:spAutoFit/>
-          </a:bodyPr>
-          <a:lstStyle/>
-          <a:p>
-            <a:pPr>
-              <a:spcAft>
-                <a:spcPts val="600"/>
-              </a:spcAft>
-            </a:pPr>
-            <a:r>
-              <a:rPr sz="1600">
-                <a:solidFill>
-                  <a:srgbClr val="222222"/>
-                </a:solidFill>
-              </a:rPr>
-              <a:t>• Запуск и базовое отображение — PASS</a:t>
-            </a:r>
-          </a:p>
-          <a:p>
-            <a:pPr>
-              <a:spcAft>
-                <a:spcPts val="600"/>
-              </a:spcAft>
-            </a:pPr>
-            <a:r>
-              <a:rPr sz="1600">
-                <a:solidFill>
-                  <a:srgbClr val="222222"/>
-                </a:solidFill>
-              </a:rPr>
-              <a:t>• Редактирование клеток мышью (одиночный клик и drag) — PASS</a:t>
-            </a:r>
-          </a:p>
-          <a:p>
-            <a:pPr>
-              <a:spcAft>
-                <a:spcPts val="600"/>
-              </a:spcAft>
-            </a:pPr>
-            <a:r>
-              <a:rPr sz="1600">
-                <a:solidFill>
-                  <a:srgbClr val="222222"/>
-                </a:solidFill>
-              </a:rPr>
-              <a:t>• Шаг и непрерывная симуляция, пробел/→ — PASS</a:t>
-            </a:r>
-          </a:p>
-          <a:p>
-            <a:pPr>
-              <a:spcAft>
-                <a:spcPts val="600"/>
-              </a:spcAft>
-            </a:pPr>
-            <a:r>
-              <a:rPr sz="1600">
-                <a:solidFill>
-                  <a:srgbClr val="222222"/>
-                </a:solidFill>
-              </a:rPr>
-              <a:t>• Скорость, очистка, случайное заполнение, сброс — PASS</a:t>
-            </a:r>
-          </a:p>
-          <a:p>
-            <a:pPr>
-              <a:spcAft>
-                <a:spcPts val="600"/>
-              </a:spcAft>
-            </a:pPr>
-            <a:r>
-              <a:rPr sz="1600">
-                <a:solidFill>
-                  <a:srgbClr val="222222"/>
-                </a:solidFill>
-              </a:rPr>
-              <a:t>• Сохранение и загрузка Life 1.06 (round-trip) — PASS</a:t>
-            </a:r>
-          </a:p>
-          <a:p>
-            <a:pPr>
-              <a:spcAft>
-                <a:spcPts val="600"/>
-              </a:spcAft>
-            </a:pPr>
-            <a:r>
-              <a:rPr sz="1600">
-                <a:solidFill>
-                  <a:srgbClr val="222222"/>
-                </a:solidFill>
-              </a:rPr>
-              <a:t>• Тороидальные границы (мигалка на краю) — PASS</a:t>
-            </a:r>
-          </a:p>
-          <a:p>
-            <a:pPr>
-              <a:spcAft>
-                <a:spcPts val="600"/>
-              </a:spcAft>
-            </a:pPr>
-            <a:r>
-              <a:rPr sz="1600">
-                <a:solidFill>
-                  <a:srgbClr val="222222"/>
-                </a:solidFill>
-              </a:rPr>
-              <a:t>• Изменение размеров окна, F11 — PASS</a:t>
-            </a:r>
-          </a:p>
-          <a:p>
-            <a:pPr>
-              <a:spcAft>
-                <a:spcPts val="600"/>
-              </a:spcAft>
-            </a:pPr>
-            <a:r>
-              <a:rPr sz="1600">
-                <a:solidFill>
-                  <a:srgbClr val="222222"/>
-                </a:solidFill>
-              </a:rPr>
-              <a:t>• Все горячие клавиши (пробел, →, C, R, S, L, F11) — PASS</a:t>
-            </a:r>
-          </a:p>
-        </p:txBody>
-      </p:sp>
-    </p:spTree>
-  </p:cSld>
-  <p:clrMapOvr>
-    <a:masterClrMapping/>
-  </p:clrMapOvr>
-</p:sld>
-</file>
-
-<file path=ppt/slides/slide17.xml><?xml version="1.0" encoding="utf-8"?>
-<p:sld xmlns:a="http://schemas.openxmlformats.org/drawingml/2006/main" xmlns:r="http://schemas.openxmlformats.org/officeDocument/2006/relationships" xmlns:p="http://schemas.openxmlformats.org/presentationml/2006/main">
-  <p:cSld>
-    <p:spTree>
-      <p:nvGrpSpPr>
-        <p:cNvPr id="1" name=""/>
-        <p:cNvGrpSpPr/>
-        <p:nvPr/>
-      </p:nvGrpSpPr>
-      <p:grpSpPr>
-        <a:xfrm>
-          <a:off x="0" y="0"/>
-          <a:ext cx="0" cy="0"/>
-          <a:chOff x="0" y="0"/>
-          <a:chExt cx="0" cy="0"/>
-        </a:xfrm>
-      </p:grpSpPr>
-      <p:sp>
-        <p:nvSpPr>
-          <p:cNvPr id="2" name="Rectangle 1"/>
-          <p:cNvSpPr/>
-          <p:nvPr/>
-        </p:nvSpPr>
-        <p:spPr>
-          <a:xfrm>
-            <a:off x="0" y="0"/>
-            <a:ext cx="12191695" cy="502920"/>
-          </a:xfrm>
-          <a:prstGeom prst="rect">
-            <a:avLst/>
-          </a:prstGeom>
-          <a:solidFill>
-            <a:srgbClr val="EAF1F8"/>
-          </a:solidFill>
-          <a:ln>
-            <a:noFill/>
-          </a:ln>
-        </p:spPr>
-        <p:style>
-          <a:lnRef idx="1">
-            <a:schemeClr val="accent1"/>
-          </a:lnRef>
-          <a:fillRef idx="3">
-            <a:schemeClr val="accent1"/>
-          </a:fillRef>
-          <a:effectRef idx="2">
-            <a:schemeClr val="accent1"/>
-          </a:effectRef>
-          <a:fontRef idx="minor">
-            <a:schemeClr val="lt1"/>
-          </a:fontRef>
-        </p:style>
-        <p:txBody>
-          <a:bodyPr rtlCol="0" anchor="ctr"/>
-          <a:lstStyle/>
-          <a:p>
-            <a:pPr algn="ctr"/>
-            <a:endParaRPr/>
-          </a:p>
-        </p:txBody>
-      </p:sp>
-      <p:sp>
-        <p:nvSpPr>
-          <p:cNvPr id="3" name="TextBox 2"/>
-          <p:cNvSpPr txBox="1"/>
-          <p:nvPr/>
-        </p:nvSpPr>
-        <p:spPr>
-          <a:xfrm>
-            <a:off x="457200" y="45720"/>
-            <a:ext cx="11277295" cy="457200"/>
-          </a:xfrm>
-          <a:prstGeom prst="rect">
-            <a:avLst/>
-          </a:prstGeom>
-          <a:noFill/>
-        </p:spPr>
-        <p:txBody>
-          <a:bodyPr wrap="square">
-            <a:spAutoFit/>
-          </a:bodyPr>
-          <a:lstStyle/>
-          <a:p>
-            <a:r>
-              <a:rPr sz="2800" b="1">
-                <a:solidFill>
-                  <a:srgbClr val="183E6B"/>
-                </a:solidFill>
-              </a:rPr>
               <a:t>Заключение</a:t>
             </a:r>
           </a:p>
@@ -6766,8 +6520,8 @@
         </p:blipFill>
         <p:spPr>
           <a:xfrm>
-            <a:off x="3150243" y="928676"/>
-            <a:ext cx="5891513" cy="5565517"/>
+            <a:off x="2858947" y="602472"/>
+            <a:ext cx="6528121" cy="6166900"/>
           </a:xfrm>
           <a:prstGeom prst="rect">
             <a:avLst/>

--- a/docs/Презентация.pptx
+++ b/docs/Презентация.pptx
@@ -10,17 +10,16 @@
     <p:sldId id="258" r:id="rId4"/>
     <p:sldId id="259" r:id="rId5"/>
     <p:sldId id="260" r:id="rId6"/>
-    <p:sldId id="261" r:id="rId7"/>
-    <p:sldId id="262" r:id="rId8"/>
-    <p:sldId id="263" r:id="rId9"/>
-    <p:sldId id="264" r:id="rId10"/>
-    <p:sldId id="265" r:id="rId11"/>
-    <p:sldId id="266" r:id="rId12"/>
-    <p:sldId id="267" r:id="rId13"/>
-    <p:sldId id="268" r:id="rId14"/>
-    <p:sldId id="269" r:id="rId15"/>
-    <p:sldId id="270" r:id="rId16"/>
-    <p:sldId id="272" r:id="rId17"/>
+    <p:sldId id="262" r:id="rId7"/>
+    <p:sldId id="273" r:id="rId8"/>
+    <p:sldId id="264" r:id="rId9"/>
+    <p:sldId id="265" r:id="rId10"/>
+    <p:sldId id="266" r:id="rId11"/>
+    <p:sldId id="267" r:id="rId12"/>
+    <p:sldId id="268" r:id="rId13"/>
+    <p:sldId id="269" r:id="rId14"/>
+    <p:sldId id="270" r:id="rId15"/>
+    <p:sldId id="272" r:id="rId16"/>
   </p:sldIdLst>
   <p:sldSz cx="12192000" cy="6858000"/>
   <p:notesSz cx="6858000" cy="9144000"/>
@@ -317,7 +316,7 @@
           <a:p>
             <a:fld id="{5BCAD085-E8A6-8845-BD4E-CB4CCA059FC4}" type="datetimeFigureOut">
               <a:rPr lang="en-US" smtClean="0"/>
-              <a:t>5/7/26</a:t>
+              <a:t>5/15/2026</a:t>
             </a:fld>
             <a:endParaRPr lang="en-US"/>
           </a:p>
@@ -485,7 +484,7 @@
           <a:p>
             <a:fld id="{5BCAD085-E8A6-8845-BD4E-CB4CCA059FC4}" type="datetimeFigureOut">
               <a:rPr lang="en-US" smtClean="0"/>
-              <a:t>5/7/26</a:t>
+              <a:t>5/15/2026</a:t>
             </a:fld>
             <a:endParaRPr lang="en-US"/>
           </a:p>
@@ -663,7 +662,7 @@
           <a:p>
             <a:fld id="{5BCAD085-E8A6-8845-BD4E-CB4CCA059FC4}" type="datetimeFigureOut">
               <a:rPr lang="en-US" smtClean="0"/>
-              <a:t>5/7/26</a:t>
+              <a:t>5/15/2026</a:t>
             </a:fld>
             <a:endParaRPr lang="en-US"/>
           </a:p>
@@ -831,7 +830,7 @@
           <a:p>
             <a:fld id="{5BCAD085-E8A6-8845-BD4E-CB4CCA059FC4}" type="datetimeFigureOut">
               <a:rPr lang="en-US" smtClean="0"/>
-              <a:t>5/7/26</a:t>
+              <a:t>5/15/2026</a:t>
             </a:fld>
             <a:endParaRPr lang="en-US"/>
           </a:p>
@@ -1076,7 +1075,7 @@
           <a:p>
             <a:fld id="{5BCAD085-E8A6-8845-BD4E-CB4CCA059FC4}" type="datetimeFigureOut">
               <a:rPr lang="en-US" smtClean="0"/>
-              <a:t>5/7/26</a:t>
+              <a:t>5/15/2026</a:t>
             </a:fld>
             <a:endParaRPr lang="en-US"/>
           </a:p>
@@ -1361,7 +1360,7 @@
           <a:p>
             <a:fld id="{5BCAD085-E8A6-8845-BD4E-CB4CCA059FC4}" type="datetimeFigureOut">
               <a:rPr lang="en-US" smtClean="0"/>
-              <a:t>5/7/26</a:t>
+              <a:t>5/15/2026</a:t>
             </a:fld>
             <a:endParaRPr lang="en-US"/>
           </a:p>
@@ -1780,7 +1779,7 @@
           <a:p>
             <a:fld id="{5BCAD085-E8A6-8845-BD4E-CB4CCA059FC4}" type="datetimeFigureOut">
               <a:rPr lang="en-US" smtClean="0"/>
-              <a:t>5/7/26</a:t>
+              <a:t>5/15/2026</a:t>
             </a:fld>
             <a:endParaRPr lang="en-US"/>
           </a:p>
@@ -1897,7 +1896,7 @@
           <a:p>
             <a:fld id="{5BCAD085-E8A6-8845-BD4E-CB4CCA059FC4}" type="datetimeFigureOut">
               <a:rPr lang="en-US" smtClean="0"/>
-              <a:t>5/7/26</a:t>
+              <a:t>5/15/2026</a:t>
             </a:fld>
             <a:endParaRPr lang="en-US"/>
           </a:p>
@@ -1992,7 +1991,7 @@
           <a:p>
             <a:fld id="{5BCAD085-E8A6-8845-BD4E-CB4CCA059FC4}" type="datetimeFigureOut">
               <a:rPr lang="en-US" smtClean="0"/>
-              <a:t>5/7/26</a:t>
+              <a:t>5/15/2026</a:t>
             </a:fld>
             <a:endParaRPr lang="en-US"/>
           </a:p>
@@ -2267,7 +2266,7 @@
           <a:p>
             <a:fld id="{5BCAD085-E8A6-8845-BD4E-CB4CCA059FC4}" type="datetimeFigureOut">
               <a:rPr lang="en-US" smtClean="0"/>
-              <a:t>5/7/26</a:t>
+              <a:t>5/15/2026</a:t>
             </a:fld>
             <a:endParaRPr lang="en-US"/>
           </a:p>
@@ -2519,7 +2518,7 @@
           <a:p>
             <a:fld id="{5BCAD085-E8A6-8845-BD4E-CB4CCA059FC4}" type="datetimeFigureOut">
               <a:rPr lang="en-US" smtClean="0"/>
-              <a:t>5/7/26</a:t>
+              <a:t>5/15/2026</a:t>
             </a:fld>
             <a:endParaRPr lang="en-US"/>
           </a:p>
@@ -2730,7 +2729,7 @@
           <a:p>
             <a:fld id="{5BCAD085-E8A6-8845-BD4E-CB4CCA059FC4}" type="datetimeFigureOut">
               <a:rPr lang="en-US" smtClean="0"/>
-              <a:t>5/7/26</a:t>
+              <a:t>5/15/2026</a:t>
             </a:fld>
             <a:endParaRPr lang="en-US"/>
           </a:p>
@@ -3440,14 +3439,14 @@
                   <a:srgbClr val="183E6B"/>
                 </a:solidFill>
               </a:rPr>
-              <a:t>Функционал: Создание мигалки</a:t>
+              <a:t>Функционал: Шаг симуляции</a:t>
             </a:r>
           </a:p>
         </p:txBody>
       </p:sp>
       <p:pic>
         <p:nvPicPr>
-          <p:cNvPr id="4" name="Picture 3" descr="02_blinker_horizontal.png"/>
+          <p:cNvPr id="4" name="Picture 3" descr="03_blinker_vertical.png"/>
           <p:cNvPicPr>
             <a:picLocks noChangeAspect="1"/>
           </p:cNvPicPr>
@@ -3497,7 +3496,7 @@
                   <a:srgbClr val="222222"/>
                 </a:solidFill>
               </a:rPr>
-              <a:t>Кликами по полю расставлены три клетки в одной строке — классический осциллятор «blinker».</a:t>
+              <a:t>После одного шага (кнопка «Шаг» / клавиша →) горизонтальная линия превратилась в вертикальную. Итерация увеличилась до 1.</a:t>
             </a:r>
           </a:p>
         </p:txBody>
@@ -3599,14 +3598,14 @@
                   <a:srgbClr val="183E6B"/>
                 </a:solidFill>
               </a:rPr>
-              <a:t>Функционал: Шаг симуляции</a:t>
+              <a:t>Функционал: Загрузка глайдера из файла</a:t>
             </a:r>
           </a:p>
         </p:txBody>
       </p:sp>
       <p:pic>
         <p:nvPicPr>
-          <p:cNvPr id="4" name="Picture 3" descr="03_blinker_vertical.png"/>
+          <p:cNvPr id="4" name="Picture 3" descr="04_glider_loaded.png"/>
           <p:cNvPicPr>
             <a:picLocks noChangeAspect="1"/>
           </p:cNvPicPr>
@@ -3656,7 +3655,7 @@
                   <a:srgbClr val="222222"/>
                 </a:solidFill>
               </a:rPr>
-              <a:t>После одного шага (кнопка «Шаг» / клавиша →) горизонтальная линия превратилась в вертикальную. Итерация увеличилась до 1.</a:t>
+              <a:t>Через «Загрузить» загружен examples/glider.cells. Имя в шапке поменялось на «Glider», правило подхватилось из файла.</a:t>
             </a:r>
           </a:p>
         </p:txBody>
@@ -3758,14 +3757,14 @@
                   <a:srgbClr val="183E6B"/>
                 </a:solidFill>
               </a:rPr>
-              <a:t>Функционал: Загрузка глайдера из файла</a:t>
+              <a:t>Функционал: Глайдер через 4 шага</a:t>
             </a:r>
           </a:p>
         </p:txBody>
       </p:sp>
       <p:pic>
         <p:nvPicPr>
-          <p:cNvPr id="4" name="Picture 3" descr="04_glider_loaded.png"/>
+          <p:cNvPr id="4" name="Picture 3" descr="05_glider_after_4_steps.png"/>
           <p:cNvPicPr>
             <a:picLocks noChangeAspect="1"/>
           </p:cNvPicPr>
@@ -3815,7 +3814,7 @@
                   <a:srgbClr val="222222"/>
                 </a:solidFill>
               </a:rPr>
-              <a:t>Через «Загрузить» загружен examples/glider.cells. Имя в шапке поменялось на «Glider», правило подхватилось из файла.</a:t>
+              <a:t>Глайдер сдвинулся по диагонали — каноническое поведение фигуры.</a:t>
             </a:r>
           </a:p>
         </p:txBody>
@@ -3917,14 +3916,14 @@
                   <a:srgbClr val="183E6B"/>
                 </a:solidFill>
               </a:rPr>
-              <a:t>Функционал: Глайдер через 4 шага</a:t>
+              <a:t>Функционал: Случайное заполнение</a:t>
             </a:r>
           </a:p>
         </p:txBody>
       </p:sp>
       <p:pic>
         <p:nvPicPr>
-          <p:cNvPr id="4" name="Picture 3" descr="05_glider_after_4_steps.png"/>
+          <p:cNvPr id="4" name="Picture 3" descr="06_random_fill.png"/>
           <p:cNvPicPr>
             <a:picLocks noChangeAspect="1"/>
           </p:cNvPicPr>
@@ -3974,7 +3973,7 @@
                   <a:srgbClr val="222222"/>
                 </a:solidFill>
               </a:rPr>
-              <a:t>Глайдер сдвинулся по диагонали — каноническое поведение фигуры.</a:t>
+              <a:t>Кнопка «Случайно» (R) заполняет поле примерно наполовину, итерация сбрасывается в 0.</a:t>
             </a:r>
           </a:p>
         </p:txBody>
@@ -4076,14 +4075,14 @@
                   <a:srgbClr val="183E6B"/>
                 </a:solidFill>
               </a:rPr>
-              <a:t>Функционал: Случайное заполнение</a:t>
+              <a:t>Функционал: Очистка поля</a:t>
             </a:r>
           </a:p>
         </p:txBody>
       </p:sp>
       <p:pic>
         <p:nvPicPr>
-          <p:cNvPr id="4" name="Picture 3" descr="06_random_fill.png"/>
+          <p:cNvPr id="4" name="Picture 3" descr="01_start.png"/>
           <p:cNvPicPr>
             <a:picLocks noChangeAspect="1"/>
           </p:cNvPicPr>
@@ -4133,7 +4132,7 @@
                   <a:srgbClr val="222222"/>
                 </a:solidFill>
               </a:rPr>
-              <a:t>Кнопка «Случайно» (R) заполняет поле примерно наполовину, итерация сбрасывается в 0.</a:t>
+              <a:t>Кнопка «Очистить» (C) приводит поле к пустому состоянию.</a:t>
             </a:r>
           </a:p>
         </p:txBody>
@@ -4235,165 +4234,6 @@
                   <a:srgbClr val="183E6B"/>
                 </a:solidFill>
               </a:rPr>
-              <a:t>Функционал: Очистка поля</a:t>
-            </a:r>
-          </a:p>
-        </p:txBody>
-      </p:sp>
-      <p:pic>
-        <p:nvPicPr>
-          <p:cNvPr id="4" name="Picture 3" descr="01_start.png"/>
-          <p:cNvPicPr>
-            <a:picLocks noChangeAspect="1"/>
-          </p:cNvPicPr>
-          <p:nvPr/>
-        </p:nvPicPr>
-        <p:blipFill>
-          <a:blip r:embed="rId2"/>
-          <a:stretch>
-            <a:fillRect/>
-          </a:stretch>
-        </p:blipFill>
-        <p:spPr>
-          <a:xfrm>
-            <a:off x="548640" y="868680"/>
-            <a:ext cx="6350000" cy="4572000"/>
-          </a:xfrm>
-          <a:prstGeom prst="rect">
-            <a:avLst/>
-          </a:prstGeom>
-        </p:spPr>
-      </p:pic>
-      <p:sp>
-        <p:nvSpPr>
-          <p:cNvPr id="5" name="TextBox 4"/>
-          <p:cNvSpPr txBox="1"/>
-          <p:nvPr/>
-        </p:nvSpPr>
-        <p:spPr>
-          <a:xfrm>
-            <a:off x="548640" y="5577840"/>
-            <a:ext cx="11094415" cy="1097280"/>
-          </a:xfrm>
-          <a:prstGeom prst="rect">
-            <a:avLst/>
-          </a:prstGeom>
-          <a:noFill/>
-        </p:spPr>
-        <p:txBody>
-          <a:bodyPr wrap="square">
-            <a:spAutoFit/>
-          </a:bodyPr>
-          <a:lstStyle/>
-          <a:p>
-            <a:r>
-              <a:rPr sz="1600" b="0">
-                <a:solidFill>
-                  <a:srgbClr val="222222"/>
-                </a:solidFill>
-              </a:rPr>
-              <a:t>Кнопка «Очистить» (C) приводит поле к пустому состоянию.</a:t>
-            </a:r>
-          </a:p>
-        </p:txBody>
-      </p:sp>
-    </p:spTree>
-  </p:cSld>
-  <p:clrMapOvr>
-    <a:masterClrMapping/>
-  </p:clrMapOvr>
-</p:sld>
-</file>
-
-<file path=ppt/slides/slide16.xml><?xml version="1.0" encoding="utf-8"?>
-<p:sld xmlns:a="http://schemas.openxmlformats.org/drawingml/2006/main" xmlns:r="http://schemas.openxmlformats.org/officeDocument/2006/relationships" xmlns:p="http://schemas.openxmlformats.org/presentationml/2006/main">
-  <p:cSld>
-    <p:spTree>
-      <p:nvGrpSpPr>
-        <p:cNvPr id="1" name=""/>
-        <p:cNvGrpSpPr/>
-        <p:nvPr/>
-      </p:nvGrpSpPr>
-      <p:grpSpPr>
-        <a:xfrm>
-          <a:off x="0" y="0"/>
-          <a:ext cx="0" cy="0"/>
-          <a:chOff x="0" y="0"/>
-          <a:chExt cx="0" cy="0"/>
-        </a:xfrm>
-      </p:grpSpPr>
-      <p:sp>
-        <p:nvSpPr>
-          <p:cNvPr id="2" name="Rectangle 1"/>
-          <p:cNvSpPr/>
-          <p:nvPr/>
-        </p:nvSpPr>
-        <p:spPr>
-          <a:xfrm>
-            <a:off x="0" y="0"/>
-            <a:ext cx="12191695" cy="502920"/>
-          </a:xfrm>
-          <a:prstGeom prst="rect">
-            <a:avLst/>
-          </a:prstGeom>
-          <a:solidFill>
-            <a:srgbClr val="EAF1F8"/>
-          </a:solidFill>
-          <a:ln>
-            <a:noFill/>
-          </a:ln>
-        </p:spPr>
-        <p:style>
-          <a:lnRef idx="1">
-            <a:schemeClr val="accent1"/>
-          </a:lnRef>
-          <a:fillRef idx="3">
-            <a:schemeClr val="accent1"/>
-          </a:fillRef>
-          <a:effectRef idx="2">
-            <a:schemeClr val="accent1"/>
-          </a:effectRef>
-          <a:fontRef idx="minor">
-            <a:schemeClr val="lt1"/>
-          </a:fontRef>
-        </p:style>
-        <p:txBody>
-          <a:bodyPr rtlCol="0" anchor="ctr"/>
-          <a:lstStyle/>
-          <a:p>
-            <a:pPr algn="ctr"/>
-            <a:endParaRPr/>
-          </a:p>
-        </p:txBody>
-      </p:sp>
-      <p:sp>
-        <p:nvSpPr>
-          <p:cNvPr id="3" name="TextBox 2"/>
-          <p:cNvSpPr txBox="1"/>
-          <p:nvPr/>
-        </p:nvSpPr>
-        <p:spPr>
-          <a:xfrm>
-            <a:off x="457200" y="45720"/>
-            <a:ext cx="11277295" cy="457200"/>
-          </a:xfrm>
-          <a:prstGeom prst="rect">
-            <a:avLst/>
-          </a:prstGeom>
-          <a:noFill/>
-        </p:spPr>
-        <p:txBody>
-          <a:bodyPr wrap="square">
-            <a:spAutoFit/>
-          </a:bodyPr>
-          <a:lstStyle/>
-          <a:p>
-            <a:r>
-              <a:rPr sz="2800" b="1">
-                <a:solidFill>
-                  <a:srgbClr val="183E6B"/>
-                </a:solidFill>
-              </a:rPr>
               <a:t>Заключение</a:t>
             </a:r>
           </a:p>
@@ -4640,12 +4480,324 @@
           <a:lstStyle/>
           <a:p>
             <a:r>
-              <a:rPr sz="1800" b="0">
-                <a:solidFill>
-                  <a:srgbClr val="222222"/>
-                </a:solidFill>
-              </a:rPr>
-              <a:t>Разработать настольное приложение, реализующее клеточный автомат «Жизнь» с интерактивным полем 20×20, пошаговой и непрерывной симуляцией, ручной расстановкой клеток, случайным заполнением, сохранением и загрузкой состояния.</a:t>
+              <a:rPr sz="1800" b="0" dirty="0" err="1">
+                <a:solidFill>
+                  <a:srgbClr val="222222"/>
+                </a:solidFill>
+              </a:rPr>
+              <a:t>Разработать</a:t>
+            </a:r>
+            <a:r>
+              <a:rPr sz="1800" b="0" dirty="0">
+                <a:solidFill>
+                  <a:srgbClr val="222222"/>
+                </a:solidFill>
+              </a:rPr>
+              <a:t> </a:t>
+            </a:r>
+            <a:r>
+              <a:rPr sz="1800" b="0" dirty="0" err="1">
+                <a:solidFill>
+                  <a:srgbClr val="222222"/>
+                </a:solidFill>
+              </a:rPr>
+              <a:t>настольное</a:t>
+            </a:r>
+            <a:r>
+              <a:rPr sz="1800" b="0" dirty="0">
+                <a:solidFill>
+                  <a:srgbClr val="222222"/>
+                </a:solidFill>
+              </a:rPr>
+              <a:t> </a:t>
+            </a:r>
+            <a:r>
+              <a:rPr sz="1800" b="0" dirty="0" err="1">
+                <a:solidFill>
+                  <a:srgbClr val="222222"/>
+                </a:solidFill>
+              </a:rPr>
+              <a:t>приложение</a:t>
+            </a:r>
+            <a:r>
+              <a:rPr sz="1800" b="0" dirty="0">
+                <a:solidFill>
+                  <a:srgbClr val="222222"/>
+                </a:solidFill>
+              </a:rPr>
+              <a:t>, </a:t>
+            </a:r>
+            <a:r>
+              <a:rPr sz="1800" b="0" dirty="0" err="1">
+                <a:solidFill>
+                  <a:srgbClr val="222222"/>
+                </a:solidFill>
+              </a:rPr>
+              <a:t>реализующее</a:t>
+            </a:r>
+            <a:r>
+              <a:rPr sz="1800" b="0" dirty="0">
+                <a:solidFill>
+                  <a:srgbClr val="222222"/>
+                </a:solidFill>
+              </a:rPr>
+              <a:t> </a:t>
+            </a:r>
+            <a:r>
+              <a:rPr sz="1800" b="0" dirty="0" err="1">
+                <a:solidFill>
+                  <a:srgbClr val="222222"/>
+                </a:solidFill>
+              </a:rPr>
+              <a:t>клеточный</a:t>
+            </a:r>
+            <a:r>
+              <a:rPr sz="1800" b="0" dirty="0">
+                <a:solidFill>
+                  <a:srgbClr val="222222"/>
+                </a:solidFill>
+              </a:rPr>
+              <a:t> </a:t>
+            </a:r>
+            <a:r>
+              <a:rPr sz="1800" b="0" dirty="0" err="1">
+                <a:solidFill>
+                  <a:srgbClr val="222222"/>
+                </a:solidFill>
+              </a:rPr>
+              <a:t>автомат</a:t>
+            </a:r>
+            <a:r>
+              <a:rPr sz="1800" b="0" dirty="0">
+                <a:solidFill>
+                  <a:srgbClr val="222222"/>
+                </a:solidFill>
+              </a:rPr>
+              <a:t> «</a:t>
+            </a:r>
+            <a:r>
+              <a:rPr sz="1800" b="0" dirty="0" err="1">
+                <a:solidFill>
+                  <a:srgbClr val="222222"/>
+                </a:solidFill>
+              </a:rPr>
+              <a:t>Жизнь</a:t>
+            </a:r>
+            <a:r>
+              <a:rPr sz="1800" b="0" dirty="0">
+                <a:solidFill>
+                  <a:srgbClr val="222222"/>
+                </a:solidFill>
+              </a:rPr>
+              <a:t>» с </a:t>
+            </a:r>
+            <a:r>
+              <a:rPr sz="1800" b="0" dirty="0" err="1">
+                <a:solidFill>
+                  <a:srgbClr val="222222"/>
+                </a:solidFill>
+              </a:rPr>
+              <a:t>интерактивным</a:t>
+            </a:r>
+            <a:r>
+              <a:rPr sz="1800" b="0" dirty="0">
+                <a:solidFill>
+                  <a:srgbClr val="222222"/>
+                </a:solidFill>
+              </a:rPr>
+              <a:t> </a:t>
+            </a:r>
+            <a:r>
+              <a:rPr sz="1800" b="0" dirty="0" err="1">
+                <a:solidFill>
+                  <a:srgbClr val="222222"/>
+                </a:solidFill>
+              </a:rPr>
+              <a:t>полем</a:t>
+            </a:r>
+            <a:r>
+              <a:rPr sz="1800" b="0" dirty="0">
+                <a:solidFill>
+                  <a:srgbClr val="222222"/>
+                </a:solidFill>
+              </a:rPr>
+              <a:t> 20×20, </a:t>
+            </a:r>
+            <a:r>
+              <a:rPr sz="1800" b="0" dirty="0" err="1">
+                <a:solidFill>
+                  <a:srgbClr val="222222"/>
+                </a:solidFill>
+              </a:rPr>
+              <a:t>пошаговой</a:t>
+            </a:r>
+            <a:r>
+              <a:rPr sz="1800" b="0" dirty="0">
+                <a:solidFill>
+                  <a:srgbClr val="222222"/>
+                </a:solidFill>
+              </a:rPr>
+              <a:t> и </a:t>
+            </a:r>
+            <a:r>
+              <a:rPr sz="1800" b="0" dirty="0" err="1">
+                <a:solidFill>
+                  <a:srgbClr val="222222"/>
+                </a:solidFill>
+              </a:rPr>
+              <a:t>непрерывной</a:t>
+            </a:r>
+            <a:r>
+              <a:rPr sz="1800" b="0" dirty="0">
+                <a:solidFill>
+                  <a:srgbClr val="222222"/>
+                </a:solidFill>
+              </a:rPr>
+              <a:t> </a:t>
+            </a:r>
+            <a:r>
+              <a:rPr sz="1800" b="0" dirty="0" err="1">
+                <a:solidFill>
+                  <a:srgbClr val="222222"/>
+                </a:solidFill>
+              </a:rPr>
+              <a:t>симуляцией</a:t>
+            </a:r>
+            <a:r>
+              <a:rPr sz="1800" b="0" dirty="0">
+                <a:solidFill>
+                  <a:srgbClr val="222222"/>
+                </a:solidFill>
+              </a:rPr>
+              <a:t>, </a:t>
+            </a:r>
+            <a:r>
+              <a:rPr sz="1800" b="0" dirty="0" err="1">
+                <a:solidFill>
+                  <a:srgbClr val="222222"/>
+                </a:solidFill>
+              </a:rPr>
+              <a:t>ручной</a:t>
+            </a:r>
+            <a:r>
+              <a:rPr sz="1800" b="0" dirty="0">
+                <a:solidFill>
+                  <a:srgbClr val="222222"/>
+                </a:solidFill>
+              </a:rPr>
+              <a:t> </a:t>
+            </a:r>
+            <a:r>
+              <a:rPr sz="1800" b="0" dirty="0" err="1">
+                <a:solidFill>
+                  <a:srgbClr val="222222"/>
+                </a:solidFill>
+              </a:rPr>
+              <a:t>расстановкой</a:t>
+            </a:r>
+            <a:r>
+              <a:rPr sz="1800" b="0" dirty="0">
+                <a:solidFill>
+                  <a:srgbClr val="222222"/>
+                </a:solidFill>
+              </a:rPr>
+              <a:t> </a:t>
+            </a:r>
+            <a:r>
+              <a:rPr sz="1800" b="0" dirty="0" err="1">
+                <a:solidFill>
+                  <a:srgbClr val="222222"/>
+                </a:solidFill>
+              </a:rPr>
+              <a:t>клеток</a:t>
+            </a:r>
+            <a:r>
+              <a:rPr sz="1800" b="0" dirty="0">
+                <a:solidFill>
+                  <a:srgbClr val="222222"/>
+                </a:solidFill>
+              </a:rPr>
+              <a:t>, </a:t>
+            </a:r>
+            <a:r>
+              <a:rPr sz="1800" b="0" dirty="0" err="1">
+                <a:solidFill>
+                  <a:srgbClr val="222222"/>
+                </a:solidFill>
+              </a:rPr>
+              <a:t>случайным</a:t>
+            </a:r>
+            <a:r>
+              <a:rPr sz="1800" b="0" dirty="0">
+                <a:solidFill>
+                  <a:srgbClr val="222222"/>
+                </a:solidFill>
+              </a:rPr>
+              <a:t> </a:t>
+            </a:r>
+            <a:r>
+              <a:rPr sz="1800" b="0" dirty="0" err="1">
+                <a:solidFill>
+                  <a:srgbClr val="222222"/>
+                </a:solidFill>
+              </a:rPr>
+              <a:t>заполнением</a:t>
+            </a:r>
+            <a:r>
+              <a:rPr sz="1800" b="0" dirty="0">
+                <a:solidFill>
+                  <a:srgbClr val="222222"/>
+                </a:solidFill>
+              </a:rPr>
+              <a:t>, </a:t>
+            </a:r>
+            <a:r>
+              <a:rPr sz="1800" b="0" dirty="0" err="1">
+                <a:solidFill>
+                  <a:srgbClr val="222222"/>
+                </a:solidFill>
+              </a:rPr>
+              <a:t>сохранением</a:t>
+            </a:r>
+            <a:r>
+              <a:rPr sz="1800" b="0" dirty="0">
+                <a:solidFill>
+                  <a:srgbClr val="222222"/>
+                </a:solidFill>
+              </a:rPr>
+              <a:t> и </a:t>
+            </a:r>
+            <a:r>
+              <a:rPr sz="1800" b="0" dirty="0" err="1">
+                <a:solidFill>
+                  <a:srgbClr val="222222"/>
+                </a:solidFill>
+              </a:rPr>
+              <a:t>загрузкой</a:t>
+            </a:r>
+            <a:r>
+              <a:rPr sz="1800" b="0" dirty="0">
+                <a:solidFill>
+                  <a:srgbClr val="222222"/>
+                </a:solidFill>
+              </a:rPr>
+              <a:t> </a:t>
+            </a:r>
+            <a:r>
+              <a:rPr sz="1800" b="0" dirty="0" err="1">
+                <a:solidFill>
+                  <a:srgbClr val="222222"/>
+                </a:solidFill>
+              </a:rPr>
+              <a:t>состояния</a:t>
+            </a:r>
+            <a:r>
+              <a:rPr sz="1800" b="0" dirty="0">
+                <a:solidFill>
+                  <a:srgbClr val="222222"/>
+                </a:solidFill>
+              </a:rPr>
+              <a:t>.</a:t>
             </a:r>
           </a:p>
         </p:txBody>
@@ -4692,7 +4844,7 @@
         <p:spPr>
           <a:xfrm>
             <a:off x="822960" y="3657600"/>
-            <a:ext cx="10728655" cy="2743200"/>
+            <a:ext cx="10728655" cy="1985159"/>
           </a:xfrm>
           <a:prstGeom prst="rect">
             <a:avLst/>
@@ -4704,50 +4856,64 @@
             <a:spAutoFit/>
           </a:bodyPr>
           <a:lstStyle/>
+          <a:p>
+            <a:pPr marL="285750" indent="-285750">
+              <a:spcAft>
+                <a:spcPts val="600"/>
+              </a:spcAft>
+              <a:buFont typeface="Arial" panose="020B0604020202020204" pitchFamily="34" charset="0"/>
+              <a:buChar char="•"/>
+            </a:pPr>
+            <a:r>
+              <a:rPr sz="1800" dirty="0">
+                <a:solidFill>
+                  <a:srgbClr val="222222"/>
+                </a:solidFill>
+              </a:rPr>
+              <a:t> </a:t>
+            </a:r>
+            <a:r>
+              <a:rPr lang="ru-RU" dirty="0"/>
+              <a:t>Клеточные автоматы широко применяются в моделировании биологических, физических и социальных процессов</a:t>
+            </a:r>
+          </a:p>
+          <a:p>
+            <a:pPr marL="285750" indent="-285750">
+              <a:spcAft>
+                <a:spcPts val="600"/>
+              </a:spcAft>
+              <a:buFont typeface="Arial" panose="020B0604020202020204" pitchFamily="34" charset="0"/>
+              <a:buChar char="•"/>
+            </a:pPr>
+            <a:r>
+              <a:rPr lang="ru-RU" dirty="0"/>
+              <a:t>«Игра Жизнь» — минимальный набор правил порождает сложные самоорганизующиеся структуры;</a:t>
+            </a:r>
+          </a:p>
+          <a:p>
+            <a:pPr marL="285750" indent="-285750">
+              <a:spcAft>
+                <a:spcPts val="600"/>
+              </a:spcAft>
+              <a:buFont typeface="Arial" panose="020B0604020202020204" pitchFamily="34" charset="0"/>
+              <a:buChar char="•"/>
+            </a:pPr>
+            <a:r>
+              <a:rPr lang="ru-RU" dirty="0"/>
+              <a:t>Разработка интерактивного симулятора позволяет на практике освоить принципы ООП, событийно-управляемого программирования и работу с графическим интерфейсом</a:t>
+            </a:r>
+          </a:p>
           <a:p>
             <a:pPr>
               <a:spcAft>
                 <a:spcPts val="600"/>
               </a:spcAft>
             </a:pPr>
-            <a:r>
-              <a:rPr sz="1800">
-                <a:solidFill>
-                  <a:srgbClr val="222222"/>
-                </a:solidFill>
-              </a:rPr>
-              <a:t>• каноническая модель — простые правила порождают сложное поведение;</a:t>
-            </a:r>
-          </a:p>
-          <a:p>
-            <a:pPr>
-              <a:spcAft>
-                <a:spcPts val="600"/>
-              </a:spcAft>
-            </a:pPr>
-            <a:r>
-              <a:rPr sz="1800">
-                <a:solidFill>
-                  <a:srgbClr val="222222"/>
-                </a:solidFill>
-              </a:rPr>
-              <a:t>• учебная база для отработки ООП и моделирования;</a:t>
-            </a:r>
-          </a:p>
-          <a:p>
-            <a:pPr>
-              <a:spcAft>
-                <a:spcPts val="600"/>
-              </a:spcAft>
-            </a:pPr>
-            <a:r>
-              <a:rPr sz="1800">
-                <a:solidFill>
-                  <a:srgbClr val="222222"/>
-                </a:solidFill>
-              </a:rPr>
-              <a:t>• наглядная визуализация дискретных систем.</a:t>
-            </a:r>
+            <a:endParaRPr sz="1800" dirty="0">
+              <a:solidFill>
+                <a:srgbClr val="222222"/>
+              </a:solidFill>
+            </a:endParaRPr>
           </a:p>
         </p:txBody>
       </p:sp>
@@ -4862,7 +5028,7 @@
         <p:spPr>
           <a:xfrm>
             <a:off x="640080" y="914400"/>
-            <a:ext cx="10911535" cy="5486400"/>
+            <a:ext cx="10911535" cy="1785104"/>
           </a:xfrm>
           <a:prstGeom prst="rect">
             <a:avLst/>
@@ -4881,12 +5047,124 @@
               </a:spcAft>
             </a:pPr>
             <a:r>
-              <a:rPr sz="1800">
-                <a:solidFill>
-                  <a:srgbClr val="222222"/>
-                </a:solidFill>
-              </a:rPr>
-              <a:t>• Спроектировать архитектуру с разделением слоёв: данные → логика → представление.</a:t>
+              <a:rPr sz="1800" dirty="0">
+                <a:solidFill>
+                  <a:srgbClr val="222222"/>
+                </a:solidFill>
+              </a:rPr>
+              <a:t>• </a:t>
+            </a:r>
+            <a:r>
+              <a:rPr sz="1800" dirty="0" err="1">
+                <a:solidFill>
+                  <a:srgbClr val="222222"/>
+                </a:solidFill>
+              </a:rPr>
+              <a:t>Спроектировать</a:t>
+            </a:r>
+            <a:r>
+              <a:rPr sz="1800" dirty="0">
+                <a:solidFill>
+                  <a:srgbClr val="222222"/>
+                </a:solidFill>
+              </a:rPr>
+              <a:t> </a:t>
+            </a:r>
+            <a:r>
+              <a:rPr sz="1800" dirty="0" err="1">
+                <a:solidFill>
+                  <a:srgbClr val="222222"/>
+                </a:solidFill>
+              </a:rPr>
+              <a:t>архитектуру</a:t>
+            </a:r>
+            <a:r>
+              <a:rPr sz="1800" dirty="0">
+                <a:solidFill>
+                  <a:srgbClr val="222222"/>
+                </a:solidFill>
+              </a:rPr>
+              <a:t> с </a:t>
+            </a:r>
+            <a:r>
+              <a:rPr sz="1800" dirty="0" err="1">
+                <a:solidFill>
+                  <a:srgbClr val="222222"/>
+                </a:solidFill>
+              </a:rPr>
+              <a:t>разделением</a:t>
+            </a:r>
+            <a:r>
+              <a:rPr sz="1800" dirty="0">
+                <a:solidFill>
+                  <a:srgbClr val="222222"/>
+                </a:solidFill>
+              </a:rPr>
+              <a:t> </a:t>
+            </a:r>
+            <a:r>
+              <a:rPr sz="1800" dirty="0" err="1">
+                <a:solidFill>
+                  <a:srgbClr val="222222"/>
+                </a:solidFill>
+              </a:rPr>
+              <a:t>слоёв</a:t>
+            </a:r>
+            <a:r>
+              <a:rPr sz="1800" dirty="0">
+                <a:solidFill>
+                  <a:srgbClr val="222222"/>
+                </a:solidFill>
+              </a:rPr>
+              <a:t>: </a:t>
+            </a:r>
+            <a:r>
+              <a:rPr sz="1800" dirty="0" err="1">
+                <a:solidFill>
+                  <a:srgbClr val="222222"/>
+                </a:solidFill>
+              </a:rPr>
+              <a:t>данные</a:t>
+            </a:r>
+            <a:r>
+              <a:rPr sz="1800" dirty="0">
+                <a:solidFill>
+                  <a:srgbClr val="222222"/>
+                </a:solidFill>
+              </a:rPr>
+              <a:t> → </a:t>
+            </a:r>
+            <a:r>
+              <a:rPr sz="1800" dirty="0" err="1">
+                <a:solidFill>
+                  <a:srgbClr val="222222"/>
+                </a:solidFill>
+              </a:rPr>
+              <a:t>логика</a:t>
+            </a:r>
+            <a:r>
+              <a:rPr sz="1800" dirty="0">
+                <a:solidFill>
+                  <a:srgbClr val="222222"/>
+                </a:solidFill>
+              </a:rPr>
+              <a:t> → </a:t>
+            </a:r>
+            <a:r>
+              <a:rPr sz="1800" dirty="0" err="1">
+                <a:solidFill>
+                  <a:srgbClr val="222222"/>
+                </a:solidFill>
+              </a:rPr>
+              <a:t>представление</a:t>
+            </a:r>
+            <a:r>
+              <a:rPr sz="1800" dirty="0">
+                <a:solidFill>
+                  <a:srgbClr val="222222"/>
+                </a:solidFill>
+              </a:rPr>
+              <a:t>.</a:t>
             </a:r>
           </a:p>
           <a:p>
@@ -4896,12 +5174,140 @@
               </a:spcAft>
             </a:pPr>
             <a:r>
-              <a:rPr sz="1800">
-                <a:solidFill>
-                  <a:srgbClr val="222222"/>
-                </a:solidFill>
-              </a:rPr>
-              <a:t>• Реализовать модель поля и правил клеточного автомата (поддержка произвольного B…/S…).</a:t>
+              <a:rPr sz="1800" dirty="0">
+                <a:solidFill>
+                  <a:srgbClr val="222222"/>
+                </a:solidFill>
+              </a:rPr>
+              <a:t>• </a:t>
+            </a:r>
+            <a:r>
+              <a:rPr sz="1800" dirty="0" err="1">
+                <a:solidFill>
+                  <a:srgbClr val="222222"/>
+                </a:solidFill>
+              </a:rPr>
+              <a:t>Реализовать</a:t>
+            </a:r>
+            <a:r>
+              <a:rPr sz="1800" dirty="0">
+                <a:solidFill>
+                  <a:srgbClr val="222222"/>
+                </a:solidFill>
+              </a:rPr>
+              <a:t> </a:t>
+            </a:r>
+            <a:r>
+              <a:rPr sz="1800" dirty="0" err="1">
+                <a:solidFill>
+                  <a:srgbClr val="222222"/>
+                </a:solidFill>
+              </a:rPr>
+              <a:t>модель</a:t>
+            </a:r>
+            <a:r>
+              <a:rPr sz="1800" dirty="0">
+                <a:solidFill>
+                  <a:srgbClr val="222222"/>
+                </a:solidFill>
+              </a:rPr>
+              <a:t> </a:t>
+            </a:r>
+            <a:r>
+              <a:rPr sz="1800" dirty="0" err="1">
+                <a:solidFill>
+                  <a:srgbClr val="222222"/>
+                </a:solidFill>
+              </a:rPr>
+              <a:t>поля</a:t>
+            </a:r>
+            <a:r>
+              <a:rPr sz="1800" dirty="0">
+                <a:solidFill>
+                  <a:srgbClr val="222222"/>
+                </a:solidFill>
+              </a:rPr>
+              <a:t> и </a:t>
+            </a:r>
+            <a:r>
+              <a:rPr sz="1800" dirty="0" err="1">
+                <a:solidFill>
+                  <a:srgbClr val="222222"/>
+                </a:solidFill>
+              </a:rPr>
+              <a:t>правил</a:t>
+            </a:r>
+            <a:r>
+              <a:rPr sz="1800" dirty="0">
+                <a:solidFill>
+                  <a:srgbClr val="222222"/>
+                </a:solidFill>
+              </a:rPr>
+              <a:t> </a:t>
+            </a:r>
+            <a:r>
+              <a:rPr sz="1800" dirty="0" err="1">
+                <a:solidFill>
+                  <a:srgbClr val="222222"/>
+                </a:solidFill>
+              </a:rPr>
+              <a:t>клеточного</a:t>
+            </a:r>
+            <a:r>
+              <a:rPr sz="1800" dirty="0">
+                <a:solidFill>
+                  <a:srgbClr val="222222"/>
+                </a:solidFill>
+              </a:rPr>
+              <a:t> </a:t>
+            </a:r>
+            <a:r>
+              <a:rPr sz="1800" dirty="0" err="1">
+                <a:solidFill>
+                  <a:srgbClr val="222222"/>
+                </a:solidFill>
+              </a:rPr>
+              <a:t>автомата</a:t>
+            </a:r>
+            <a:r>
+              <a:rPr sz="1800" dirty="0">
+                <a:solidFill>
+                  <a:srgbClr val="222222"/>
+                </a:solidFill>
+              </a:rPr>
+              <a:t> (</a:t>
+            </a:r>
+            <a:r>
+              <a:rPr sz="1800" dirty="0" err="1">
+                <a:solidFill>
+                  <a:srgbClr val="222222"/>
+                </a:solidFill>
+              </a:rPr>
+              <a:t>поддержка</a:t>
+            </a:r>
+            <a:r>
+              <a:rPr sz="1800" dirty="0">
+                <a:solidFill>
+                  <a:srgbClr val="222222"/>
+                </a:solidFill>
+              </a:rPr>
+              <a:t> </a:t>
+            </a:r>
+            <a:r>
+              <a:rPr sz="1800" dirty="0" err="1">
+                <a:solidFill>
+                  <a:srgbClr val="222222"/>
+                </a:solidFill>
+              </a:rPr>
+              <a:t>произвольного</a:t>
+            </a:r>
+            <a:r>
+              <a:rPr sz="1800" dirty="0">
+                <a:solidFill>
+                  <a:srgbClr val="222222"/>
+                </a:solidFill>
+              </a:rPr>
+              <a:t> B…/S…).</a:t>
             </a:r>
           </a:p>
           <a:p>
@@ -4911,12 +5317,172 @@
               </a:spcAft>
             </a:pPr>
             <a:r>
-              <a:rPr sz="1800">
-                <a:solidFill>
-                  <a:srgbClr val="222222"/>
-                </a:solidFill>
-              </a:rPr>
-              <a:t>• Создать графический интерфейс на Tkinter: канвас, кнопки, ползунок скорости, статистика.</a:t>
+              <a:rPr sz="1800" dirty="0">
+                <a:solidFill>
+                  <a:srgbClr val="222222"/>
+                </a:solidFill>
+              </a:rPr>
+              <a:t>• </a:t>
+            </a:r>
+            <a:r>
+              <a:rPr sz="1800" dirty="0" err="1">
+                <a:solidFill>
+                  <a:srgbClr val="222222"/>
+                </a:solidFill>
+              </a:rPr>
+              <a:t>Создать</a:t>
+            </a:r>
+            <a:r>
+              <a:rPr sz="1800" dirty="0">
+                <a:solidFill>
+                  <a:srgbClr val="222222"/>
+                </a:solidFill>
+              </a:rPr>
+              <a:t> </a:t>
+            </a:r>
+            <a:r>
+              <a:rPr sz="1800" dirty="0" err="1">
+                <a:solidFill>
+                  <a:srgbClr val="222222"/>
+                </a:solidFill>
+              </a:rPr>
+              <a:t>графический</a:t>
+            </a:r>
+            <a:r>
+              <a:rPr sz="1800" dirty="0">
+                <a:solidFill>
+                  <a:srgbClr val="222222"/>
+                </a:solidFill>
+              </a:rPr>
+              <a:t> </a:t>
+            </a:r>
+            <a:r>
+              <a:rPr sz="1800" dirty="0" err="1">
+                <a:solidFill>
+                  <a:srgbClr val="222222"/>
+                </a:solidFill>
+              </a:rPr>
+              <a:t>интерфейс</a:t>
+            </a:r>
+            <a:r>
+              <a:rPr sz="1800" dirty="0">
+                <a:solidFill>
+                  <a:srgbClr val="222222"/>
+                </a:solidFill>
+              </a:rPr>
+              <a:t> </a:t>
+            </a:r>
+            <a:r>
+              <a:rPr sz="1800" dirty="0" err="1">
+                <a:solidFill>
+                  <a:srgbClr val="222222"/>
+                </a:solidFill>
+              </a:rPr>
+              <a:t>на</a:t>
+            </a:r>
+            <a:r>
+              <a:rPr sz="1800" dirty="0">
+                <a:solidFill>
+                  <a:srgbClr val="222222"/>
+                </a:solidFill>
+              </a:rPr>
+              <a:t> </a:t>
+            </a:r>
+            <a:r>
+              <a:rPr sz="1800" dirty="0" err="1">
+                <a:solidFill>
+                  <a:srgbClr val="222222"/>
+                </a:solidFill>
+              </a:rPr>
+              <a:t>Tkinter</a:t>
+            </a:r>
+            <a:r>
+              <a:rPr sz="1800" dirty="0">
+                <a:solidFill>
+                  <a:srgbClr val="222222"/>
+                </a:solidFill>
+              </a:rPr>
+              <a:t>: </a:t>
+            </a:r>
+            <a:r>
+              <a:rPr sz="1800" dirty="0" err="1">
+                <a:solidFill>
+                  <a:srgbClr val="222222"/>
+                </a:solidFill>
+              </a:rPr>
+              <a:t>канвас</a:t>
+            </a:r>
+            <a:r>
+              <a:rPr sz="1800" dirty="0">
+                <a:solidFill>
+                  <a:srgbClr val="222222"/>
+                </a:solidFill>
+              </a:rPr>
+              <a:t>, </a:t>
+            </a:r>
+            <a:r>
+              <a:rPr sz="1800" dirty="0" err="1">
+                <a:solidFill>
+                  <a:srgbClr val="222222"/>
+                </a:solidFill>
+              </a:rPr>
+              <a:t>кнопки</a:t>
+            </a:r>
+            <a:r>
+              <a:rPr sz="1800" dirty="0">
+                <a:solidFill>
+                  <a:srgbClr val="222222"/>
+                </a:solidFill>
+              </a:rPr>
+              <a:t>, </a:t>
+            </a:r>
+            <a:r>
+              <a:rPr sz="1800" dirty="0" err="1">
+                <a:solidFill>
+                  <a:srgbClr val="222222"/>
+                </a:solidFill>
+              </a:rPr>
+              <a:t>ползунок</a:t>
+            </a:r>
+            <a:r>
+              <a:rPr sz="1800" dirty="0">
+                <a:solidFill>
+                  <a:srgbClr val="222222"/>
+                </a:solidFill>
+              </a:rPr>
+              <a:t> </a:t>
+            </a:r>
+            <a:r>
+              <a:rPr sz="1800" dirty="0" err="1">
+                <a:solidFill>
+                  <a:srgbClr val="222222"/>
+                </a:solidFill>
+              </a:rPr>
+              <a:t>скорости</a:t>
+            </a:r>
+            <a:r>
+              <a:rPr sz="1800" dirty="0">
+                <a:solidFill>
+                  <a:srgbClr val="222222"/>
+                </a:solidFill>
+              </a:rPr>
+              <a:t>, </a:t>
+            </a:r>
+            <a:r>
+              <a:rPr sz="1800" dirty="0" err="1">
+                <a:solidFill>
+                  <a:srgbClr val="222222"/>
+                </a:solidFill>
+              </a:rPr>
+              <a:t>статистика</a:t>
+            </a:r>
+            <a:r>
+              <a:rPr sz="1800" dirty="0">
+                <a:solidFill>
+                  <a:srgbClr val="222222"/>
+                </a:solidFill>
+              </a:rPr>
+              <a:t>.</a:t>
             </a:r>
           </a:p>
           <a:p>
@@ -4926,12 +5492,108 @@
               </a:spcAft>
             </a:pPr>
             <a:r>
-              <a:rPr sz="1800">
-                <a:solidFill>
-                  <a:srgbClr val="222222"/>
-                </a:solidFill>
-              </a:rPr>
-              <a:t>• Обеспечить редактирование поля мышью (клик и перетаскивание).</a:t>
+              <a:rPr sz="1800" dirty="0">
+                <a:solidFill>
+                  <a:srgbClr val="222222"/>
+                </a:solidFill>
+              </a:rPr>
+              <a:t>• </a:t>
+            </a:r>
+            <a:r>
+              <a:rPr sz="1800" dirty="0" err="1">
+                <a:solidFill>
+                  <a:srgbClr val="222222"/>
+                </a:solidFill>
+              </a:rPr>
+              <a:t>Обеспечить</a:t>
+            </a:r>
+            <a:r>
+              <a:rPr sz="1800" dirty="0">
+                <a:solidFill>
+                  <a:srgbClr val="222222"/>
+                </a:solidFill>
+              </a:rPr>
+              <a:t> </a:t>
+            </a:r>
+            <a:r>
+              <a:rPr sz="1800" dirty="0" err="1">
+                <a:solidFill>
+                  <a:srgbClr val="222222"/>
+                </a:solidFill>
+              </a:rPr>
+              <a:t>редактирование</a:t>
+            </a:r>
+            <a:r>
+              <a:rPr sz="1800" dirty="0">
+                <a:solidFill>
+                  <a:srgbClr val="222222"/>
+                </a:solidFill>
+              </a:rPr>
+              <a:t> </a:t>
+            </a:r>
+            <a:r>
+              <a:rPr sz="1800" dirty="0" err="1">
+                <a:solidFill>
+                  <a:srgbClr val="222222"/>
+                </a:solidFill>
+              </a:rPr>
+              <a:t>поля</a:t>
+            </a:r>
+            <a:r>
+              <a:rPr sz="1800" dirty="0">
+                <a:solidFill>
+                  <a:srgbClr val="222222"/>
+                </a:solidFill>
+              </a:rPr>
+              <a:t> </a:t>
+            </a:r>
+            <a:r>
+              <a:rPr sz="1800" dirty="0" err="1">
+                <a:solidFill>
+                  <a:srgbClr val="222222"/>
+                </a:solidFill>
+              </a:rPr>
+              <a:t>мышью</a:t>
+            </a:r>
+            <a:r>
+              <a:rPr sz="1800" dirty="0">
+                <a:solidFill>
+                  <a:srgbClr val="222222"/>
+                </a:solidFill>
+              </a:rPr>
+              <a:t> (</a:t>
+            </a:r>
+            <a:r>
+              <a:rPr sz="1800" dirty="0" err="1">
+                <a:solidFill>
+                  <a:srgbClr val="222222"/>
+                </a:solidFill>
+              </a:rPr>
+              <a:t>клик</a:t>
+            </a:r>
+            <a:r>
+              <a:rPr sz="1800" dirty="0">
+                <a:solidFill>
+                  <a:srgbClr val="222222"/>
+                </a:solidFill>
+              </a:rPr>
+              <a:t> и </a:t>
+            </a:r>
+            <a:r>
+              <a:rPr sz="1800" dirty="0" err="1">
+                <a:solidFill>
+                  <a:srgbClr val="222222"/>
+                </a:solidFill>
+              </a:rPr>
+              <a:t>перетаскивание</a:t>
+            </a:r>
+            <a:r>
+              <a:rPr sz="1800" dirty="0">
+                <a:solidFill>
+                  <a:srgbClr val="222222"/>
+                </a:solidFill>
+              </a:rPr>
+              <a:t>).</a:t>
             </a:r>
           </a:p>
           <a:p>
@@ -4941,27 +5603,92 @@
               </a:spcAft>
             </a:pPr>
             <a:r>
-              <a:rPr sz="1800">
-                <a:solidFill>
-                  <a:srgbClr val="222222"/>
-                </a:solidFill>
-              </a:rPr>
-              <a:t>• Реализовать сохранение и загрузку поля в формате Life 1.06.</a:t>
-            </a:r>
-          </a:p>
-          <a:p>
-            <a:pPr>
-              <a:spcAft>
-                <a:spcPts val="600"/>
-              </a:spcAft>
-            </a:pPr>
-            <a:r>
-              <a:rPr sz="1800">
-                <a:solidFill>
-                  <a:srgbClr val="222222"/>
-                </a:solidFill>
-              </a:rPr>
-              <a:t>• Покрыть приложение сценарием тестирования и подготовить отчёт.</a:t>
+              <a:rPr sz="1800" dirty="0">
+                <a:solidFill>
+                  <a:srgbClr val="222222"/>
+                </a:solidFill>
+              </a:rPr>
+              <a:t>• </a:t>
+            </a:r>
+            <a:r>
+              <a:rPr sz="1800" dirty="0" err="1">
+                <a:solidFill>
+                  <a:srgbClr val="222222"/>
+                </a:solidFill>
+              </a:rPr>
+              <a:t>Реализовать</a:t>
+            </a:r>
+            <a:r>
+              <a:rPr sz="1800" dirty="0">
+                <a:solidFill>
+                  <a:srgbClr val="222222"/>
+                </a:solidFill>
+              </a:rPr>
+              <a:t> </a:t>
+            </a:r>
+            <a:r>
+              <a:rPr sz="1800" dirty="0" err="1">
+                <a:solidFill>
+                  <a:srgbClr val="222222"/>
+                </a:solidFill>
+              </a:rPr>
+              <a:t>сохранение</a:t>
+            </a:r>
+            <a:r>
+              <a:rPr sz="1800" dirty="0">
+                <a:solidFill>
+                  <a:srgbClr val="222222"/>
+                </a:solidFill>
+              </a:rPr>
+              <a:t> и </a:t>
+            </a:r>
+            <a:r>
+              <a:rPr sz="1800" dirty="0" err="1">
+                <a:solidFill>
+                  <a:srgbClr val="222222"/>
+                </a:solidFill>
+              </a:rPr>
+              <a:t>загрузку</a:t>
+            </a:r>
+            <a:r>
+              <a:rPr sz="1800" dirty="0">
+                <a:solidFill>
+                  <a:srgbClr val="222222"/>
+                </a:solidFill>
+              </a:rPr>
+              <a:t> </a:t>
+            </a:r>
+            <a:r>
+              <a:rPr sz="1800" dirty="0" err="1">
+                <a:solidFill>
+                  <a:srgbClr val="222222"/>
+                </a:solidFill>
+              </a:rPr>
+              <a:t>поля</a:t>
+            </a:r>
+            <a:r>
+              <a:rPr sz="1800" dirty="0">
+                <a:solidFill>
+                  <a:srgbClr val="222222"/>
+                </a:solidFill>
+              </a:rPr>
+              <a:t> в </a:t>
+            </a:r>
+            <a:r>
+              <a:rPr sz="1800" dirty="0" err="1">
+                <a:solidFill>
+                  <a:srgbClr val="222222"/>
+                </a:solidFill>
+              </a:rPr>
+              <a:t>формате</a:t>
+            </a:r>
+            <a:r>
+              <a:rPr sz="1800" dirty="0">
+                <a:solidFill>
+                  <a:srgbClr val="222222"/>
+                </a:solidFill>
+              </a:rPr>
+              <a:t> Life 1.06.</a:t>
             </a:r>
           </a:p>
         </p:txBody>
@@ -5322,7 +6049,7 @@
         <p:spPr>
           <a:xfrm>
             <a:off x="640080" y="914400"/>
-            <a:ext cx="10911535" cy="2139047"/>
+            <a:ext cx="10911535" cy="1785104"/>
           </a:xfrm>
           <a:prstGeom prst="rect">
             <a:avLst/>
@@ -5346,7 +6073,7 @@
                   <a:srgbClr val="222222"/>
                 </a:solidFill>
               </a:rPr>
-              <a:t>• Python 3.10+; </a:t>
+              <a:t>• </a:t>
             </a:r>
             <a:r>
               <a:rPr sz="1800" dirty="0" err="1">
@@ -5354,7 +6081,7 @@
                   <a:srgbClr val="222222"/>
                 </a:solidFill>
               </a:rPr>
-              <a:t>интерфейс</a:t>
+              <a:t>Запуск</a:t>
             </a:r>
             <a:r>
               <a:rPr sz="1800" dirty="0">
@@ -5362,7 +6089,7 @@
                   <a:srgbClr val="222222"/>
                 </a:solidFill>
               </a:rPr>
-              <a:t> — </a:t>
+              <a:t> </a:t>
             </a:r>
             <a:r>
               <a:rPr sz="1800" dirty="0" err="1">
@@ -5370,7 +6097,7 @@
                   <a:srgbClr val="222222"/>
                 </a:solidFill>
               </a:rPr>
-              <a:t>стандартный</a:t>
+              <a:t>одной</a:t>
             </a:r>
             <a:r>
               <a:rPr sz="1800" dirty="0">
@@ -5386,7 +6113,7 @@
                   <a:srgbClr val="222222"/>
                 </a:solidFill>
               </a:rPr>
-              <a:t>Tkinter</a:t>
+              <a:t>командой</a:t>
             </a:r>
             <a:r>
               <a:rPr sz="1800" dirty="0">
@@ -5394,118 +6121,7 @@
                   <a:srgbClr val="222222"/>
                 </a:solidFill>
               </a:rPr>
-              <a:t> (</a:t>
-            </a:r>
-            <a:r>
-              <a:rPr sz="1800" dirty="0" err="1">
-                <a:solidFill>
-                  <a:srgbClr val="222222"/>
-                </a:solidFill>
-              </a:rPr>
-              <a:t>без</a:t>
-            </a:r>
-            <a:r>
-              <a:rPr sz="1800" dirty="0">
-                <a:solidFill>
-                  <a:srgbClr val="222222"/>
-                </a:solidFill>
-              </a:rPr>
-              <a:t> </a:t>
-            </a:r>
-            <a:r>
-              <a:rPr sz="1800" dirty="0" err="1">
-                <a:solidFill>
-                  <a:srgbClr val="222222"/>
-                </a:solidFill>
-              </a:rPr>
-              <a:t>сторонних</a:t>
-            </a:r>
-            <a:r>
-              <a:rPr sz="1800" dirty="0">
-                <a:solidFill>
-                  <a:srgbClr val="222222"/>
-                </a:solidFill>
-              </a:rPr>
-              <a:t> GUI).</a:t>
-            </a:r>
-          </a:p>
-          <a:p>
-            <a:pPr>
-              <a:spcAft>
-                <a:spcPts val="600"/>
-              </a:spcAft>
-            </a:pPr>
-            <a:r>
-              <a:rPr sz="1800" dirty="0">
-                <a:solidFill>
-                  <a:srgbClr val="222222"/>
-                </a:solidFill>
-              </a:rPr>
-              <a:t>• </a:t>
-            </a:r>
-            <a:r>
-              <a:rPr sz="1800" dirty="0" err="1">
-                <a:solidFill>
-                  <a:srgbClr val="222222"/>
-                </a:solidFill>
-              </a:rPr>
-              <a:t>Запуск</a:t>
-            </a:r>
-            <a:r>
-              <a:rPr sz="1800" dirty="0">
-                <a:solidFill>
-                  <a:srgbClr val="222222"/>
-                </a:solidFill>
-              </a:rPr>
-              <a:t> </a:t>
-            </a:r>
-            <a:r>
-              <a:rPr sz="1800" dirty="0" err="1">
-                <a:solidFill>
-                  <a:srgbClr val="222222"/>
-                </a:solidFill>
-              </a:rPr>
-              <a:t>одной</a:t>
-            </a:r>
-            <a:r>
-              <a:rPr sz="1800" dirty="0">
-                <a:solidFill>
-                  <a:srgbClr val="222222"/>
-                </a:solidFill>
-              </a:rPr>
-              <a:t> </a:t>
-            </a:r>
-            <a:r>
-              <a:rPr sz="1800" dirty="0" err="1">
-                <a:solidFill>
-                  <a:srgbClr val="222222"/>
-                </a:solidFill>
-              </a:rPr>
-              <a:t>командой</a:t>
-            </a:r>
-            <a:r>
-              <a:rPr sz="1800" dirty="0">
-                <a:solidFill>
-                  <a:srgbClr val="222222"/>
-                </a:solidFill>
-              </a:rPr>
-              <a:t>: python </a:t>
-            </a:r>
-            <a:r>
-              <a:rPr sz="1800" dirty="0" err="1">
-                <a:solidFill>
-                  <a:srgbClr val="222222"/>
-                </a:solidFill>
-              </a:rPr>
-              <a:t>main.py</a:t>
-            </a:r>
-            <a:r>
-              <a:rPr sz="1800" dirty="0">
-                <a:solidFill>
-                  <a:srgbClr val="222222"/>
-                </a:solidFill>
-              </a:rPr>
-              <a:t>. </a:t>
+              <a:t>: python main.py. </a:t>
             </a:r>
             <a:r>
               <a:rPr sz="1800" dirty="0" err="1">
@@ -6067,341 +6683,35 @@
                   <a:srgbClr val="183E6B"/>
                 </a:solidFill>
               </a:rPr>
-              <a:t>Используемые технологии</a:t>
-            </a:r>
-          </a:p>
-        </p:txBody>
-      </p:sp>
-      <p:sp>
-        <p:nvSpPr>
-          <p:cNvPr id="4" name="TextBox 3"/>
-          <p:cNvSpPr txBox="1"/>
+              <a:t>Архитектура: диаграмма классов</a:t>
+            </a:r>
+          </a:p>
+        </p:txBody>
+      </p:sp>
+      <p:pic>
+        <p:nvPicPr>
+          <p:cNvPr id="4" name="Picture 3" descr="class_diagram.png"/>
+          <p:cNvPicPr>
+            <a:picLocks noChangeAspect="1"/>
+          </p:cNvPicPr>
           <p:nvPr/>
-        </p:nvSpPr>
-        <p:spPr>
-          <a:xfrm>
-            <a:off x="640080" y="914400"/>
-            <a:ext cx="3200400" cy="457200"/>
+        </p:nvPicPr>
+        <p:blipFill>
+          <a:blip r:embed="rId2"/>
+          <a:stretch>
+            <a:fillRect/>
+          </a:stretch>
+        </p:blipFill>
+        <p:spPr>
+          <a:xfrm>
+            <a:off x="2858947" y="602472"/>
+            <a:ext cx="6528121" cy="6166900"/>
           </a:xfrm>
           <a:prstGeom prst="rect">
             <a:avLst/>
           </a:prstGeom>
-          <a:noFill/>
-        </p:spPr>
-        <p:txBody>
-          <a:bodyPr wrap="square">
-            <a:spAutoFit/>
-          </a:bodyPr>
-          <a:lstStyle/>
-          <a:p>
-            <a:r>
-              <a:rPr sz="2000" b="1">
-                <a:solidFill>
-                  <a:srgbClr val="2C884D"/>
-                </a:solidFill>
-              </a:rPr>
-              <a:t>Python 3.10+</a:t>
-            </a:r>
-          </a:p>
-        </p:txBody>
-      </p:sp>
-      <p:sp>
-        <p:nvSpPr>
-          <p:cNvPr id="5" name="TextBox 4"/>
-          <p:cNvSpPr txBox="1"/>
-          <p:nvPr/>
-        </p:nvSpPr>
-        <p:spPr>
-          <a:xfrm>
-            <a:off x="4023360" y="914400"/>
-            <a:ext cx="7619695" cy="822960"/>
-          </a:xfrm>
-          <a:prstGeom prst="rect">
-            <a:avLst/>
-          </a:prstGeom>
-          <a:noFill/>
-        </p:spPr>
-        <p:txBody>
-          <a:bodyPr wrap="square">
-            <a:spAutoFit/>
-          </a:bodyPr>
-          <a:lstStyle/>
-          <a:p>
-            <a:r>
-              <a:rPr sz="1600" b="0">
-                <a:solidFill>
-                  <a:srgbClr val="222222"/>
-                </a:solidFill>
-              </a:rPr>
-              <a:t>выразительный синтаксис, встроенный ООП, минимальные зависимости.</a:t>
-            </a:r>
-          </a:p>
-        </p:txBody>
-      </p:sp>
-      <p:sp>
-        <p:nvSpPr>
-          <p:cNvPr id="6" name="TextBox 5"/>
-          <p:cNvSpPr txBox="1"/>
-          <p:nvPr/>
-        </p:nvSpPr>
-        <p:spPr>
-          <a:xfrm>
-            <a:off x="640080" y="1874520"/>
-            <a:ext cx="3200400" cy="457200"/>
-          </a:xfrm>
-          <a:prstGeom prst="rect">
-            <a:avLst/>
-          </a:prstGeom>
-          <a:noFill/>
-        </p:spPr>
-        <p:txBody>
-          <a:bodyPr wrap="square">
-            <a:spAutoFit/>
-          </a:bodyPr>
-          <a:lstStyle/>
-          <a:p>
-            <a:r>
-              <a:rPr sz="2000" b="1">
-                <a:solidFill>
-                  <a:srgbClr val="2C884D"/>
-                </a:solidFill>
-              </a:rPr>
-              <a:t>Tkinter</a:t>
-            </a:r>
-          </a:p>
-        </p:txBody>
-      </p:sp>
-      <p:sp>
-        <p:nvSpPr>
-          <p:cNvPr id="7" name="TextBox 6"/>
-          <p:cNvSpPr txBox="1"/>
-          <p:nvPr/>
-        </p:nvSpPr>
-        <p:spPr>
-          <a:xfrm>
-            <a:off x="4023360" y="1874520"/>
-            <a:ext cx="7619695" cy="822960"/>
-          </a:xfrm>
-          <a:prstGeom prst="rect">
-            <a:avLst/>
-          </a:prstGeom>
-          <a:noFill/>
-        </p:spPr>
-        <p:txBody>
-          <a:bodyPr wrap="square">
-            <a:spAutoFit/>
-          </a:bodyPr>
-          <a:lstStyle/>
-          <a:p>
-            <a:r>
-              <a:rPr sz="1600" b="0">
-                <a:solidFill>
-                  <a:srgbClr val="222222"/>
-                </a:solidFill>
-              </a:rPr>
-              <a:t>стандартная библиотека Python, достаточная для канваса и кнопок; PyGame избыточен, Qt тянет тяжёлые зависимости.</a:t>
-            </a:r>
-          </a:p>
-        </p:txBody>
-      </p:sp>
-      <p:sp>
-        <p:nvSpPr>
-          <p:cNvPr id="8" name="TextBox 7"/>
-          <p:cNvSpPr txBox="1"/>
-          <p:nvPr/>
-        </p:nvSpPr>
-        <p:spPr>
-          <a:xfrm>
-            <a:off x="640080" y="2834640"/>
-            <a:ext cx="3200400" cy="457200"/>
-          </a:xfrm>
-          <a:prstGeom prst="rect">
-            <a:avLst/>
-          </a:prstGeom>
-          <a:noFill/>
-        </p:spPr>
-        <p:txBody>
-          <a:bodyPr wrap="square">
-            <a:spAutoFit/>
-          </a:bodyPr>
-          <a:lstStyle/>
-          <a:p>
-            <a:r>
-              <a:rPr sz="2000" b="1">
-                <a:solidFill>
-                  <a:srgbClr val="2C884D"/>
-                </a:solidFill>
-              </a:rPr>
-              <a:t>dataclasses</a:t>
-            </a:r>
-          </a:p>
-        </p:txBody>
-      </p:sp>
-      <p:sp>
-        <p:nvSpPr>
-          <p:cNvPr id="9" name="TextBox 8"/>
-          <p:cNvSpPr txBox="1"/>
-          <p:nvPr/>
-        </p:nvSpPr>
-        <p:spPr>
-          <a:xfrm>
-            <a:off x="4023360" y="2834640"/>
-            <a:ext cx="7619695" cy="822960"/>
-          </a:xfrm>
-          <a:prstGeom prst="rect">
-            <a:avLst/>
-          </a:prstGeom>
-          <a:noFill/>
-        </p:spPr>
-        <p:txBody>
-          <a:bodyPr wrap="square">
-            <a:spAutoFit/>
-          </a:bodyPr>
-          <a:lstStyle/>
-          <a:p>
-            <a:r>
-              <a:rPr sz="1600" b="0">
-                <a:solidFill>
-                  <a:srgbClr val="222222"/>
-                </a:solidFill>
-              </a:rPr>
-              <a:t>лаконичное описание Point.</a:t>
-            </a:r>
-          </a:p>
-        </p:txBody>
-      </p:sp>
-      <p:sp>
-        <p:nvSpPr>
-          <p:cNvPr id="10" name="TextBox 9"/>
-          <p:cNvSpPr txBox="1"/>
-          <p:nvPr/>
-        </p:nvSpPr>
-        <p:spPr>
-          <a:xfrm>
-            <a:off x="640080" y="3794760"/>
-            <a:ext cx="3200400" cy="457200"/>
-          </a:xfrm>
-          <a:prstGeom prst="rect">
-            <a:avLst/>
-          </a:prstGeom>
-          <a:noFill/>
-        </p:spPr>
-        <p:txBody>
-          <a:bodyPr wrap="square">
-            <a:spAutoFit/>
-          </a:bodyPr>
-          <a:lstStyle/>
-          <a:p>
-            <a:r>
-              <a:rPr sz="2000" b="1">
-                <a:solidFill>
-                  <a:srgbClr val="2C884D"/>
-                </a:solidFill>
-              </a:rPr>
-              <a:t>abc.ABC</a:t>
-            </a:r>
-          </a:p>
-        </p:txBody>
-      </p:sp>
-      <p:sp>
-        <p:nvSpPr>
-          <p:cNvPr id="11" name="TextBox 10"/>
-          <p:cNvSpPr txBox="1"/>
-          <p:nvPr/>
-        </p:nvSpPr>
-        <p:spPr>
-          <a:xfrm>
-            <a:off x="4023360" y="3794760"/>
-            <a:ext cx="7619695" cy="822960"/>
-          </a:xfrm>
-          <a:prstGeom prst="rect">
-            <a:avLst/>
-          </a:prstGeom>
-          <a:noFill/>
-        </p:spPr>
-        <p:txBody>
-          <a:bodyPr wrap="square">
-            <a:spAutoFit/>
-          </a:bodyPr>
-          <a:lstStyle/>
-          <a:p>
-            <a:r>
-              <a:rPr sz="1600" b="0">
-                <a:solidFill>
-                  <a:srgbClr val="222222"/>
-                </a:solidFill>
-              </a:rPr>
-              <a:t>иерархия правил Rule с полиморфным интерфейсом.</a:t>
-            </a:r>
-          </a:p>
-        </p:txBody>
-      </p:sp>
-      <p:sp>
-        <p:nvSpPr>
-          <p:cNvPr id="12" name="TextBox 11"/>
-          <p:cNvSpPr txBox="1"/>
-          <p:nvPr/>
-        </p:nvSpPr>
-        <p:spPr>
-          <a:xfrm>
-            <a:off x="640080" y="4754880"/>
-            <a:ext cx="3200400" cy="457200"/>
-          </a:xfrm>
-          <a:prstGeom prst="rect">
-            <a:avLst/>
-          </a:prstGeom>
-          <a:noFill/>
-        </p:spPr>
-        <p:txBody>
-          <a:bodyPr wrap="square">
-            <a:spAutoFit/>
-          </a:bodyPr>
-          <a:lstStyle/>
-          <a:p>
-            <a:r>
-              <a:rPr sz="2000" b="1">
-                <a:solidFill>
-                  <a:srgbClr val="2C884D"/>
-                </a:solidFill>
-              </a:rPr>
-              <a:t>Формат Life 1.06</a:t>
-            </a:r>
-          </a:p>
-        </p:txBody>
-      </p:sp>
-      <p:sp>
-        <p:nvSpPr>
-          <p:cNvPr id="13" name="TextBox 12"/>
-          <p:cNvSpPr txBox="1"/>
-          <p:nvPr/>
-        </p:nvSpPr>
-        <p:spPr>
-          <a:xfrm>
-            <a:off x="4023360" y="4754880"/>
-            <a:ext cx="7619695" cy="822960"/>
-          </a:xfrm>
-          <a:prstGeom prst="rect">
-            <a:avLst/>
-          </a:prstGeom>
-          <a:noFill/>
-        </p:spPr>
-        <p:txBody>
-          <a:bodyPr wrap="square">
-            <a:spAutoFit/>
-          </a:bodyPr>
-          <a:lstStyle/>
-          <a:p>
-            <a:r>
-              <a:rPr sz="1600" b="0">
-                <a:solidFill>
-                  <a:srgbClr val="222222"/>
-                </a:solidFill>
-              </a:rPr>
-              <a:t>де-факто стандарт хранения паттернов «Жизни»; легко читается.</a:t>
-            </a:r>
-          </a:p>
-        </p:txBody>
-      </p:sp>
+        </p:spPr>
+      </p:pic>
     </p:spTree>
   </p:cSld>
   <p:clrMapOvr>
@@ -6415,7 +6725,13 @@
   <p:cSld>
     <p:spTree>
       <p:nvGrpSpPr>
-        <p:cNvPr id="1" name=""/>
+        <p:cNvPr id="1" name="">
+          <a:extLst>
+            <a:ext uri="{FF2B5EF4-FFF2-40B4-BE49-F238E27FC236}">
+              <a16:creationId xmlns:a16="http://schemas.microsoft.com/office/drawing/2014/main" id="{8DDCAB06-CB51-0683-40ED-59F3EFE84931}"/>
+            </a:ext>
+          </a:extLst>
+        </p:cNvPr>
         <p:cNvGrpSpPr/>
         <p:nvPr/>
       </p:nvGrpSpPr>
@@ -6429,7 +6745,13 @@
       </p:grpSpPr>
       <p:sp>
         <p:nvSpPr>
-          <p:cNvPr id="2" name="Rectangle 1"/>
+          <p:cNvPr id="2" name="Rectangle 1">
+            <a:extLst>
+              <a:ext uri="{FF2B5EF4-FFF2-40B4-BE49-F238E27FC236}">
+                <a16:creationId xmlns:a16="http://schemas.microsoft.com/office/drawing/2014/main" id="{1505ED18-60B1-04BF-7F21-685763F2B191}"/>
+              </a:ext>
+            </a:extLst>
+          </p:cNvPr>
           <p:cNvSpPr/>
           <p:nvPr/>
         </p:nvSpPr>
@@ -6473,14 +6795,20 @@
       </p:sp>
       <p:sp>
         <p:nvSpPr>
-          <p:cNvPr id="3" name="TextBox 2"/>
+          <p:cNvPr id="3" name="TextBox 2">
+            <a:extLst>
+              <a:ext uri="{FF2B5EF4-FFF2-40B4-BE49-F238E27FC236}">
+                <a16:creationId xmlns:a16="http://schemas.microsoft.com/office/drawing/2014/main" id="{3D85DEE1-513F-EBD4-BC6B-21CEB185E0F4}"/>
+              </a:ext>
+            </a:extLst>
+          </p:cNvPr>
           <p:cNvSpPr txBox="1"/>
           <p:nvPr/>
         </p:nvSpPr>
         <p:spPr>
           <a:xfrm>
             <a:off x="457200" y="45720"/>
-            <a:ext cx="11277295" cy="457200"/>
+            <a:ext cx="11277295" cy="523220"/>
           </a:xfrm>
           <a:prstGeom prst="rect">
             <a:avLst/>
@@ -6494,41 +6822,89 @@
           <a:lstStyle/>
           <a:p>
             <a:r>
-              <a:rPr sz="2800" b="1">
+              <a:rPr lang="ru-RU" sz="2800" b="1" dirty="0">
                 <a:solidFill>
                   <a:srgbClr val="183E6B"/>
                 </a:solidFill>
               </a:rPr>
-              <a:t>Архитектура: диаграмма классов</a:t>
-            </a:r>
-          </a:p>
-        </p:txBody>
-      </p:sp>
-      <p:pic>
-        <p:nvPicPr>
-          <p:cNvPr id="4" name="Picture 3" descr="class_diagram.png"/>
-          <p:cNvPicPr>
-            <a:picLocks noChangeAspect="1"/>
-          </p:cNvPicPr>
+              <a:t>Описание принципа работы</a:t>
+            </a:r>
+            <a:endParaRPr sz="2800" b="1" dirty="0">
+              <a:solidFill>
+                <a:srgbClr val="183E6B"/>
+              </a:solidFill>
+            </a:endParaRPr>
+          </a:p>
+        </p:txBody>
+      </p:sp>
+      <p:sp>
+        <p:nvSpPr>
+          <p:cNvPr id="4" name="TextBox 3">
+            <a:extLst>
+              <a:ext uri="{FF2B5EF4-FFF2-40B4-BE49-F238E27FC236}">
+                <a16:creationId xmlns:a16="http://schemas.microsoft.com/office/drawing/2014/main" id="{713B2D83-F094-E5B8-CB14-B5D1507B3FE7}"/>
+              </a:ext>
+            </a:extLst>
+          </p:cNvPr>
+          <p:cNvSpPr txBox="1"/>
           <p:nvPr/>
-        </p:nvPicPr>
-        <p:blipFill>
-          <a:blip r:embed="rId2"/>
-          <a:stretch>
-            <a:fillRect/>
-          </a:stretch>
-        </p:blipFill>
-        <p:spPr>
-          <a:xfrm>
-            <a:off x="2858947" y="602472"/>
-            <a:ext cx="6528121" cy="6166900"/>
+        </p:nvSpPr>
+        <p:spPr>
+          <a:xfrm>
+            <a:off x="640080" y="914400"/>
+            <a:ext cx="10911535" cy="2585323"/>
           </a:xfrm>
           <a:prstGeom prst="rect">
             <a:avLst/>
           </a:prstGeom>
-        </p:spPr>
-      </p:pic>
+          <a:noFill/>
+        </p:spPr>
+        <p:txBody>
+          <a:bodyPr wrap="square">
+            <a:spAutoFit/>
+          </a:bodyPr>
+          <a:lstStyle/>
+          <a:p>
+            <a:pPr>
+              <a:spcAft>
+                <a:spcPts val="600"/>
+              </a:spcAft>
+            </a:pPr>
+            <a:r>
+              <a:rPr lang="ru-RU" dirty="0"/>
+              <a:t>На сетке каждая клетка либо «живая», либо «мёртвая». На каждом шаге клетка рождается, выживает или умирает по трём простым правилам (зависят от числа соседей). Больше ничего — дальше система развивается сама. Это «песочница», в которой три строчки правил порождают бесконечное разнообразие поведения — и при этом отличный способ прокачать навыки программирования.</a:t>
+            </a:r>
+            <a:br>
+              <a:rPr lang="ru-RU" dirty="0"/>
+            </a:br>
+            <a:br>
+              <a:rPr lang="ru-RU" dirty="0"/>
+            </a:br>
+            <a:r>
+              <a:rPr lang="ru-RU" dirty="0"/>
+              <a:t>Это не игра в привычном смысле — это математическая модель, которая показывает, как из очень простых правил может возникать сложное, непредсказуемое поведение. Это называется эмерджентность.</a:t>
+            </a:r>
+            <a:r>
+              <a:rPr lang="ru-RU" dirty="0">
+                <a:solidFill>
+                  <a:srgbClr val="222222"/>
+                </a:solidFill>
+              </a:rPr>
+              <a:t> </a:t>
+            </a:r>
+            <a:r>
+              <a:rPr lang="ru-RU" dirty="0"/>
+              <a:t>Никакого центрального управления — каждая клетка действует по локальным правилам, но вся система ведёт себя как живой организм.</a:t>
+            </a:r>
+          </a:p>
+        </p:txBody>
+      </p:sp>
     </p:spTree>
+    <p:extLst>
+      <p:ext uri="{BB962C8B-B14F-4D97-AF65-F5344CB8AC3E}">
+        <p14:creationId xmlns:p14="http://schemas.microsoft.com/office/powerpoint/2010/main" val="868695704"/>
+      </p:ext>
+    </p:extLst>
   </p:cSld>
   <p:clrMapOvr>
     <a:masterClrMapping/>
@@ -6625,21 +7001,45 @@
                   <a:srgbClr val="183E6B"/>
                 </a:solidFill>
               </a:rPr>
-              <a:t>Применённые принципы ООП</a:t>
-            </a:r>
-          </a:p>
-        </p:txBody>
-      </p:sp>
-      <p:sp>
-        <p:nvSpPr>
-          <p:cNvPr id="4" name="TextBox 3"/>
+              <a:t>Функционал: Запуск и пустое поле</a:t>
+            </a:r>
+          </a:p>
+        </p:txBody>
+      </p:sp>
+      <p:pic>
+        <p:nvPicPr>
+          <p:cNvPr id="4" name="Picture 3" descr="01_start.png"/>
+          <p:cNvPicPr>
+            <a:picLocks noChangeAspect="1"/>
+          </p:cNvPicPr>
+          <p:nvPr/>
+        </p:nvPicPr>
+        <p:blipFill>
+          <a:blip r:embed="rId2"/>
+          <a:stretch>
+            <a:fillRect/>
+          </a:stretch>
+        </p:blipFill>
+        <p:spPr>
+          <a:xfrm>
+            <a:off x="548640" y="868680"/>
+            <a:ext cx="6350000" cy="4572000"/>
+          </a:xfrm>
+          <a:prstGeom prst="rect">
+            <a:avLst/>
+          </a:prstGeom>
+        </p:spPr>
+      </p:pic>
+      <p:sp>
+        <p:nvSpPr>
+          <p:cNvPr id="5" name="TextBox 4"/>
           <p:cNvSpPr txBox="1"/>
           <p:nvPr/>
         </p:nvSpPr>
         <p:spPr>
           <a:xfrm>
-            <a:off x="640080" y="914400"/>
-            <a:ext cx="2743200" cy="548640"/>
+            <a:off x="548640" y="5577840"/>
+            <a:ext cx="11094415" cy="1097280"/>
           </a:xfrm>
           <a:prstGeom prst="rect">
             <a:avLst/>
@@ -6653,309 +7053,12 @@
           <a:lstStyle/>
           <a:p>
             <a:r>
-              <a:rPr sz="2000" b="1">
-                <a:solidFill>
-                  <a:srgbClr val="2C884D"/>
-                </a:solidFill>
-              </a:rPr>
-              <a:t>Инкапсуляция</a:t>
-            </a:r>
-          </a:p>
-        </p:txBody>
-      </p:sp>
-      <p:sp>
-        <p:nvSpPr>
-          <p:cNvPr id="5" name="TextBox 4"/>
-          <p:cNvSpPr txBox="1"/>
-          <p:nvPr/>
-        </p:nvSpPr>
-        <p:spPr>
-          <a:xfrm>
-            <a:off x="3566160" y="914400"/>
-            <a:ext cx="8076895" cy="822960"/>
-          </a:xfrm>
-          <a:prstGeom prst="rect">
-            <a:avLst/>
-          </a:prstGeom>
-          <a:noFill/>
-        </p:spPr>
-        <p:txBody>
-          <a:bodyPr wrap="square">
-            <a:spAutoFit/>
-          </a:bodyPr>
-          <a:lstStyle/>
-          <a:p>
-            <a:r>
               <a:rPr sz="1600" b="0">
                 <a:solidFill>
                   <a:srgbClr val="222222"/>
                 </a:solidFill>
               </a:rPr>
-              <a:t>Все атрибуты приватные (_field, _cells, _rule); доступ — через методы и @property.</a:t>
-            </a:r>
-          </a:p>
-        </p:txBody>
-      </p:sp>
-      <p:sp>
-        <p:nvSpPr>
-          <p:cNvPr id="6" name="TextBox 5"/>
-          <p:cNvSpPr txBox="1"/>
-          <p:nvPr/>
-        </p:nvSpPr>
-        <p:spPr>
-          <a:xfrm>
-            <a:off x="640080" y="1874520"/>
-            <a:ext cx="2743200" cy="548640"/>
-          </a:xfrm>
-          <a:prstGeom prst="rect">
-            <a:avLst/>
-          </a:prstGeom>
-          <a:noFill/>
-        </p:spPr>
-        <p:txBody>
-          <a:bodyPr wrap="square">
-            <a:spAutoFit/>
-          </a:bodyPr>
-          <a:lstStyle/>
-          <a:p>
-            <a:r>
-              <a:rPr sz="2000" b="1">
-                <a:solidFill>
-                  <a:srgbClr val="2C884D"/>
-                </a:solidFill>
-              </a:rPr>
-              <a:t>Наследование</a:t>
-            </a:r>
-          </a:p>
-        </p:txBody>
-      </p:sp>
-      <p:sp>
-        <p:nvSpPr>
-          <p:cNvPr id="7" name="TextBox 6"/>
-          <p:cNvSpPr txBox="1"/>
-          <p:nvPr/>
-        </p:nvSpPr>
-        <p:spPr>
-          <a:xfrm>
-            <a:off x="3566160" y="1874520"/>
-            <a:ext cx="8076895" cy="822960"/>
-          </a:xfrm>
-          <a:prstGeom prst="rect">
-            <a:avLst/>
-          </a:prstGeom>
-          <a:noFill/>
-        </p:spPr>
-        <p:txBody>
-          <a:bodyPr wrap="square">
-            <a:spAutoFit/>
-          </a:bodyPr>
-          <a:lstStyle/>
-          <a:p>
-            <a:r>
-              <a:rPr sz="1600" b="0">
-                <a:solidFill>
-                  <a:srgbClr val="222222"/>
-                </a:solidFill>
-              </a:rPr>
-              <a:t>Rule → CustomRule → ConwayRule. ConwayRule переиспользует логику родителя.</a:t>
-            </a:r>
-          </a:p>
-        </p:txBody>
-      </p:sp>
-      <p:sp>
-        <p:nvSpPr>
-          <p:cNvPr id="8" name="TextBox 7"/>
-          <p:cNvSpPr txBox="1"/>
-          <p:nvPr/>
-        </p:nvSpPr>
-        <p:spPr>
-          <a:xfrm>
-            <a:off x="640080" y="2834640"/>
-            <a:ext cx="2743200" cy="548640"/>
-          </a:xfrm>
-          <a:prstGeom prst="rect">
-            <a:avLst/>
-          </a:prstGeom>
-          <a:noFill/>
-        </p:spPr>
-        <p:txBody>
-          <a:bodyPr wrap="square">
-            <a:spAutoFit/>
-          </a:bodyPr>
-          <a:lstStyle/>
-          <a:p>
-            <a:r>
-              <a:rPr sz="2000" b="1">
-                <a:solidFill>
-                  <a:srgbClr val="2C884D"/>
-                </a:solidFill>
-              </a:rPr>
-              <a:t>Полиморфизм</a:t>
-            </a:r>
-          </a:p>
-        </p:txBody>
-      </p:sp>
-      <p:sp>
-        <p:nvSpPr>
-          <p:cNvPr id="9" name="TextBox 8"/>
-          <p:cNvSpPr txBox="1"/>
-          <p:nvPr/>
-        </p:nvSpPr>
-        <p:spPr>
-          <a:xfrm>
-            <a:off x="3566160" y="2834640"/>
-            <a:ext cx="8076895" cy="822960"/>
-          </a:xfrm>
-          <a:prstGeom prst="rect">
-            <a:avLst/>
-          </a:prstGeom>
-          <a:noFill/>
-        </p:spPr>
-        <p:txBody>
-          <a:bodyPr wrap="square">
-            <a:spAutoFit/>
-          </a:bodyPr>
-          <a:lstStyle/>
-          <a:p>
-            <a:r>
-              <a:rPr sz="1600" b="0">
-                <a:solidFill>
-                  <a:srgbClr val="222222"/>
-                </a:solidFill>
-              </a:rPr>
-              <a:t>GameModel.compute_iteration зовёт rule.next_state(...) — конкретный класс не важен.</a:t>
-            </a:r>
-          </a:p>
-        </p:txBody>
-      </p:sp>
-      <p:sp>
-        <p:nvSpPr>
-          <p:cNvPr id="10" name="TextBox 9"/>
-          <p:cNvSpPr txBox="1"/>
-          <p:nvPr/>
-        </p:nvSpPr>
-        <p:spPr>
-          <a:xfrm>
-            <a:off x="640080" y="3794760"/>
-            <a:ext cx="2743200" cy="548640"/>
-          </a:xfrm>
-          <a:prstGeom prst="rect">
-            <a:avLst/>
-          </a:prstGeom>
-          <a:noFill/>
-        </p:spPr>
-        <p:txBody>
-          <a:bodyPr wrap="square">
-            <a:spAutoFit/>
-          </a:bodyPr>
-          <a:lstStyle/>
-          <a:p>
-            <a:r>
-              <a:rPr sz="2000" b="1">
-                <a:solidFill>
-                  <a:srgbClr val="2C884D"/>
-                </a:solidFill>
-              </a:rPr>
-              <a:t>Минимум связей</a:t>
-            </a:r>
-          </a:p>
-        </p:txBody>
-      </p:sp>
-      <p:sp>
-        <p:nvSpPr>
-          <p:cNvPr id="11" name="TextBox 10"/>
-          <p:cNvSpPr txBox="1"/>
-          <p:nvPr/>
-        </p:nvSpPr>
-        <p:spPr>
-          <a:xfrm>
-            <a:off x="3566160" y="3794760"/>
-            <a:ext cx="8076895" cy="822960"/>
-          </a:xfrm>
-          <a:prstGeom prst="rect">
-            <a:avLst/>
-          </a:prstGeom>
-          <a:noFill/>
-        </p:spPr>
-        <p:txBody>
-          <a:bodyPr wrap="square">
-            <a:spAutoFit/>
-          </a:bodyPr>
-          <a:lstStyle/>
-          <a:p>
-            <a:r>
-              <a:rPr sz="1600" b="0">
-                <a:solidFill>
-                  <a:srgbClr val="222222"/>
-                </a:solidFill>
-              </a:rPr>
-              <a:t>GUI знает только GameModel и LifeFileIO; не лезет в Field, Point и Rule.</a:t>
-            </a:r>
-          </a:p>
-        </p:txBody>
-      </p:sp>
-      <p:sp>
-        <p:nvSpPr>
-          <p:cNvPr id="12" name="TextBox 11"/>
-          <p:cNvSpPr txBox="1"/>
-          <p:nvPr/>
-        </p:nvSpPr>
-        <p:spPr>
-          <a:xfrm>
-            <a:off x="640080" y="4754880"/>
-            <a:ext cx="2743200" cy="548640"/>
-          </a:xfrm>
-          <a:prstGeom prst="rect">
-            <a:avLst/>
-          </a:prstGeom>
-          <a:noFill/>
-        </p:spPr>
-        <p:txBody>
-          <a:bodyPr wrap="square">
-            <a:spAutoFit/>
-          </a:bodyPr>
-          <a:lstStyle/>
-          <a:p>
-            <a:r>
-              <a:rPr sz="2000" b="1">
-                <a:solidFill>
-                  <a:srgbClr val="2C884D"/>
-                </a:solidFill>
-              </a:rPr>
-              <a:t>SRP</a:t>
-            </a:r>
-          </a:p>
-        </p:txBody>
-      </p:sp>
-      <p:sp>
-        <p:nvSpPr>
-          <p:cNvPr id="13" name="TextBox 12"/>
-          <p:cNvSpPr txBox="1"/>
-          <p:nvPr/>
-        </p:nvSpPr>
-        <p:spPr>
-          <a:xfrm>
-            <a:off x="3566160" y="4754880"/>
-            <a:ext cx="8076895" cy="822960"/>
-          </a:xfrm>
-          <a:prstGeom prst="rect">
-            <a:avLst/>
-          </a:prstGeom>
-          <a:noFill/>
-        </p:spPr>
-        <p:txBody>
-          <a:bodyPr wrap="square">
-            <a:spAutoFit/>
-          </a:bodyPr>
-          <a:lstStyle/>
-          <a:p>
-            <a:r>
-              <a:rPr sz="1600" b="0">
-                <a:solidFill>
-                  <a:srgbClr val="222222"/>
-                </a:solidFill>
-              </a:rPr>
-              <a:t>Один класс = одна задача: данные / правило / хранение / логика / I/O / интерфейс.</a:t>
+              <a:t>Окно с панелью кнопок, регулятором скорости, строкой статистики (имя, итерация, число живых клеток, правило) и игровым полем 20×20.</a:t>
             </a:r>
           </a:p>
         </p:txBody>
@@ -7057,14 +7160,14 @@
                   <a:srgbClr val="183E6B"/>
                 </a:solidFill>
               </a:rPr>
-              <a:t>Функционал: Запуск и пустое поле</a:t>
+              <a:t>Функционал: Создание мигалки</a:t>
             </a:r>
           </a:p>
         </p:txBody>
       </p:sp>
       <p:pic>
         <p:nvPicPr>
-          <p:cNvPr id="4" name="Picture 3" descr="01_start.png"/>
+          <p:cNvPr id="4" name="Picture 3" descr="02_blinker_horizontal.png"/>
           <p:cNvPicPr>
             <a:picLocks noChangeAspect="1"/>
           </p:cNvPicPr>
@@ -7114,7 +7217,7 @@
                   <a:srgbClr val="222222"/>
                 </a:solidFill>
               </a:rPr>
-              <a:t>Окно с панелью кнопок, регулятором скорости, строкой статистики (имя, итерация, число живых клеток, правило) и игровым полем 20×20.</a:t>
+              <a:t>Кликами по полю расставлены три клетки в одной строке — классический осциллятор «blinker».</a:t>
             </a:r>
           </a:p>
         </p:txBody>
